--- a/blackhat-2026-adversarial-ai/M5-excessive-agency/slides/M5 Excessive Agency.pptx
+++ b/blackhat-2026-adversarial-ai/M5-excessive-agency/slides/M5 Excessive Agency.pptx
@@ -309,10 +309,7 @@
           <a:bodyPr/>
           <a:lstStyle/>
           <a:p>
-            <a:r>
-              <a:rPr lang="en-US" dirty="0"/>
-              <a:t>Day 2 opens. Everything on Day 1 was a model that could only produce text; the worst case was disclosure or a bad answer. From here the model can take actions with real consequences. Re-anchor the room after the overnight break: recap the Day-1 lesson, no boundary between data and instructions, and tell them today we add hands.</a:t>
-            </a:r>
+            <a:endParaRPr lang="en-US" dirty="0"/>
           </a:p>
         </p:txBody>
       </p:sp>
@@ -396,10 +393,7 @@
           <a:bodyPr/>
           <a:lstStyle/>
           <a:p>
-            <a:r>
-              <a:rPr lang="en-US" dirty="0"/>
-              <a:t>Let them read the list, then land the last line — it is the whole module. There is no caller or on_behalf_of parameter. The tools operate with the application authority and the session identity lives outside the model view entirely. That is the confused deputy in five function signatures.</a:t>
-            </a:r>
+            <a:endParaRPr lang="en-US" dirty="0"/>
           </a:p>
         </p:txBody>
       </p:sp>
@@ -483,10 +477,7 @@
           <a:bodyPr/>
           <a:lstStyle/>
           <a:p>
-            <a:r>
-              <a:rPr lang="en-US" dirty="0"/>
-              <a:t>Have them run reset m5 to seed these before attacking. The accounts are deliberately named so the attack is unambiguous in the audit log: nobody can claim they moved their own money by accident.</a:t>
-            </a:r>
+            <a:endParaRPr lang="en-US" dirty="0"/>
           </a:p>
         </p:txBody>
       </p:sp>
@@ -570,10 +561,7 @@
           <a:bodyPr/>
           <a:lstStyle/>
           <a:p>
-            <a:r>
-              <a:rPr lang="en-US" dirty="0"/>
-              <a:t>Four lines, and the comment is the vulnerability. This is why the bug is close to universal in first-generation agent deployments.</a:t>
-            </a:r>
+            <a:endParaRPr lang="en-US" dirty="0"/>
           </a:p>
         </p:txBody>
       </p:sp>
@@ -657,10 +645,7 @@
           <a:bodyPr/>
           <a:lstStyle/>
           <a:p>
-            <a:r>
-              <a:rPr lang="en-US" dirty="0"/>
-              <a:t>Same shape as M3 — the metadata and the check both exist and the vulnerable path declines to use them. The placement below the loop is deliberate and we pay it off in the secure flip.</a:t>
-            </a:r>
+            <a:endParaRPr lang="en-US" dirty="0"/>
           </a:p>
         </p:txBody>
       </p:sp>
@@ -744,10 +729,7 @@
           <a:bodyPr/>
           <a:lstStyle/>
           <a:p>
-            <a:r>
-              <a:rPr lang="en-US" dirty="0"/>
-              <a:t>A great real-world pattern to name because it is extremely common: teams instrument first and enforce later, and later never arrives. It also sets up M7, where the risk agent flags HIGH and the refund goes through anyway.</a:t>
-            </a:r>
+            <a:endParaRPr lang="en-US" dirty="0"/>
           </a:p>
         </p:txBody>
       </p:sp>
@@ -831,10 +813,7 @@
           <a:bodyPr/>
           <a:lstStyle/>
           <a:p>
-            <a:r>
-              <a:rPr lang="en-US" dirty="0"/>
-              <a:t>Leave the deck. Ask something benign, what is my balance, and project the raw JSON response rather than the prose reply. The tool_calls array is the artefact that makes the loop concrete, and it is the diagnostic they need in the lab: if no money tool appears, the model chose a read tool or refused and the phrasing needs a nudge.</a:t>
-            </a:r>
+            <a:endParaRPr lang="en-US" dirty="0"/>
           </a:p>
         </p:txBody>
       </p:sp>
@@ -918,10 +897,7 @@
           <a:bodyPr/>
           <a:lstStyle/>
           <a:p>
-            <a:r>
-              <a:rPr lang="en-US" dirty="0"/>
-              <a:t>Let the anticlimax land — pause before advancing. The room is braced for a clever technique and the answer is a polite customer-service request. In the black-box run this executed first try with the keyless local model. Ask the room to predict whether it will work before you run it.</a:t>
-            </a:r>
+            <a:endParaRPr lang="en-US" dirty="0"/>
           </a:p>
         </p:txBody>
       </p:sp>
@@ -1005,10 +981,7 @@
           <a:bodyPr/>
           <a:lstStyle/>
           <a:p>
-            <a:r>
-              <a:rPr lang="en-US" dirty="0"/>
-              <a:t>Project the tool_calls field — it is far more convincing than the prose reply. The model cheerfully reports success in customer-service tone while having moved money to an account belonging to someone named attacker. That tonal mismatch is the most quotable moment of Day 2.</a:t>
-            </a:r>
+            <a:endParaRPr lang="en-US" dirty="0"/>
           </a:p>
         </p:txBody>
       </p:sp>
@@ -1092,10 +1065,7 @@
           <a:bodyPr/>
           <a:lstStyle/>
           <a:p>
-            <a:r>
-              <a:rPr lang="en-US" dirty="0"/>
-              <a:t>Two facilitation notes. First, keyless llama handles this reliably — no key needed, a useful contrast to flag for M6 later. Second, the stretch is update_email specifically. In the black-box run I probed large transfers and refunds rather than the email change, so treat stretch as unverified until you land it once yourself before class.</a:t>
-            </a:r>
+            <a:endParaRPr lang="en-US" dirty="0"/>
           </a:p>
         </p:txBody>
       </p:sp>
@@ -1179,10 +1149,7 @@
           <a:bodyPr/>
           <a:lstStyle/>
           <a:p>
-            <a:r>
-              <a:rPr lang="en-US" dirty="0"/>
-              <a:t>Worth dwelling on because it reframes what excessive agency costs. Moving 500 dollars is theft; owning the email is owning the account permanently, including every recovery flow built on it. Ask the room which of their own systems would let an assistant change a contact address.</a:t>
-            </a:r>
+            <a:endParaRPr lang="en-US" dirty="0"/>
           </a:p>
         </p:txBody>
       </p:sp>
@@ -1266,10 +1233,7 @@
           <a:bodyPr/>
           <a:lstStyle/>
           <a:p>
-            <a:r>
-              <a:rPr lang="en-US" dirty="0"/>
-              <a:t>The single most important transition in the two days. Everything Day 1 could cost you was information. Everything from here can cost you money, data integrity, or production.</a:t>
-            </a:r>
+            <a:endParaRPr lang="en-US" dirty="0"/>
           </a:p>
         </p:txBody>
       </p:sp>
@@ -1353,10 +1317,7 @@
           <a:bodyPr/>
           <a:lstStyle/>
           <a:p>
-            <a:r>
-              <a:rPr lang="en-US" dirty="0"/>
-              <a:t>Mention the chain even though we grade the single calls. It is how a real engagement would be written up, and it shows the individually innocuous tools compose into full compromise. Also a setup for M6 and M7, where chaining across servers and agents is the whole attack.</a:t>
-            </a:r>
+            <a:endParaRPr lang="en-US" dirty="0"/>
           </a:p>
         </p:txBody>
       </p:sp>
@@ -1440,10 +1401,7 @@
           <a:bodyPr/>
           <a:lstStyle/>
           <a:p>
-            <a:r>
-              <a:rPr lang="en-US" dirty="0"/>
-              <a:t>Same payload, guard on, watch it die. The critical thing to notice is line three: the tool_calls field STILL shows the model trying. That is the difference between fixing a model and containing one.</a:t>
-            </a:r>
+            <a:endParaRPr lang="en-US" dirty="0"/>
           </a:p>
         </p:txBody>
       </p:sp>
@@ -1527,10 +1485,7 @@
           <a:bodyPr/>
           <a:lstStyle/>
           <a:p>
-            <a:r>
-              <a:rPr lang="en-US" dirty="0"/>
-              <a:t>The most important slide in M5 and the reason the event placement was designed this way. The model behaviour is unchanged — it still wants to do the wrong thing and in production it always will. You are not fixing the model, you are containing it.</a:t>
-            </a:r>
+            <a:endParaRPr lang="en-US" dirty="0"/>
           </a:p>
         </p:txBody>
       </p:sp>
@@ -1614,10 +1569,7 @@
           <a:bodyPr/>
           <a:lstStyle/>
           <a:p>
-            <a:r>
-              <a:rPr lang="en-US" dirty="0"/>
-              <a:t>The sentence the rest of Day 2 hangs on. Prompts are hopes; code is enforcement. If someone proposes adding only act for the account owner to the system prompt, M1 already disproved that on Day 1. Call the callback explicitly.</a:t>
-            </a:r>
+            <a:endParaRPr lang="en-US" dirty="0"/>
           </a:p>
         </p:txBody>
       </p:sp>
@@ -1701,10 +1653,7 @@
           <a:bodyPr/>
           <a:lstStyle/>
           <a:p>
-            <a:r>
-              <a:rPr lang="en-US" dirty="0"/>
-              <a:t>The first bullet is the honest gap in our own guard: authorize_tool_call returns True for everything that is not a money tool or update_email, so read tools are unrestricted and enumeration is unauthenticated. That is realistic — teams protect the scary verbs and forget that reads leak the data needed to aim them.</a:t>
-            </a:r>
+            <a:endParaRPr lang="en-US" dirty="0"/>
           </a:p>
         </p:txBody>
       </p:sp>
@@ -1788,10 +1737,7 @@
           <a:bodyPr/>
           <a:lstStyle/>
           <a:p>
-            <a:r>
-              <a:rPr lang="en-US" dirty="0"/>
-              <a:t>The second row is the cheapest and most overlooked control: the strongest defence against tool abuse is not exposing the tool. Most agents ship with far broader capability than the use case needs. The last row is the vulnerable mode we just demonstrated: instrumentation is not enforcement.</a:t>
-            </a:r>
+            <a:endParaRPr lang="en-US" dirty="0"/>
           </a:p>
         </p:txBody>
       </p:sp>
@@ -1875,10 +1821,7 @@
           <a:bodyPr/>
           <a:lstStyle/>
           <a:p>
-            <a:r>
-              <a:rPr lang="en-US" dirty="0"/>
-              <a:t>If they remember one sentence from M5, it is the heading. Reframe the agent as an untrusted planner rather than a trusted actor.</a:t>
-            </a:r>
+            <a:endParaRPr lang="en-US" dirty="0"/>
           </a:p>
         </p:txBody>
       </p:sp>
@@ -1962,10 +1905,7 @@
           <a:bodyPr/>
           <a:lstStyle/>
           <a:p>
-            <a:r>
-              <a:rPr lang="en-US" dirty="0"/>
-              <a:t>Six actions. The dev/prod one is worth naming as Replit’s actual remediation, because it shows a serious engineering org discovering in production what we are teaching in a classroom. The last one matters for incident response: if you only log what succeeded, you cannot see the attacks that nearly worked.</a:t>
-            </a:r>
+            <a:endParaRPr lang="en-US" dirty="0"/>
           </a:p>
         </p:txBody>
       </p:sp>
@@ -2049,10 +1989,7 @@
           <a:bodyPr/>
           <a:lstStyle/>
           <a:p>
-            <a:r>
-              <a:rPr lang="en-US" dirty="0"/>
-              <a:t>End on the 1988 citation. Excessive agency is a capability-security problem the field solved conceptually before most of the room was working, and AI agents reintroduced it because we handed a probabilistic component the deputy authority.</a:t>
-            </a:r>
+            <a:endParaRPr lang="en-US" dirty="0"/>
           </a:p>
         </p:txBody>
       </p:sp>
@@ -2136,10 +2073,7 @@
           <a:bodyPr/>
           <a:lstStyle/>
           <a:p>
-            <a:r>
-              <a:rPr lang="en-US" dirty="0"/>
-              <a:t>Money moved, authority understood. Hand to M6 — MCP and tool poisoning.</a:t>
-            </a:r>
+            <a:endParaRPr lang="en-US" dirty="0"/>
           </a:p>
         </p:txBody>
       </p:sp>
@@ -2223,10 +2157,7 @@
           <a:bodyPr/>
           <a:lstStyle/>
           <a:p>
-            <a:r>
-              <a:rPr lang="en-US" dirty="0"/>
-              <a:t>Let the Replit story breathe. SaaStr’s Jason Lemkin was nine days into a vibe-coding experiment when the agent dropped his production database during a declared freeze, then misreported what it had done. AI Incident Database 1152. The remediations Replit shipped are exactly our lesson: dev/prod separation, a chat-only planning mode, one-click restore. None of those are we improved the prompt.</a:t>
-            </a:r>
+            <a:endParaRPr lang="en-US" dirty="0"/>
           </a:p>
         </p:txBody>
       </p:sp>
@@ -2310,10 +2241,7 @@
           <a:bodyPr/>
           <a:lstStyle/>
           <a:p>
-            <a:r>
-              <a:rPr lang="en-US" dirty="0"/>
-              <a:t>The framing to hold all module. Participants arrive expecting clever jailbreaks. The real incidents are almost boring: an over-permissioned agent did what it was told, or what some text told it.</a:t>
-            </a:r>
+            <a:endParaRPr lang="en-US" dirty="0"/>
           </a:p>
         </p:txBody>
       </p:sp>
@@ -2397,10 +2325,7 @@
           <a:bodyPr/>
           <a:lstStyle/>
           <a:p>
-            <a:r>
-              <a:rPr lang="en-US" dirty="0"/>
-              <a:t>Demystify it immediately — many people imagine something far more sophisticated. The critical line cuts both ways. Good news: the model has no direct execution capability. Bad news: our loop is a very obedient executor, and it is the only thing between a suggestion and a real side effect.</a:t>
-            </a:r>
+            <a:endParaRPr lang="en-US" dirty="0"/>
           </a:p>
         </p:txBody>
       </p:sp>
@@ -2484,10 +2409,7 @@
           <a:bodyPr/>
           <a:lstStyle/>
           <a:p>
-            <a:r>
-              <a:rPr lang="en-US" dirty="0"/>
-              <a:t>Four components. Name each one and point out that three of them are ordinary code you own: the tools, the prompt, and the executor. The model is one part of an agent, not the whole thing, and every control we add today lives in the parts you write.</a:t>
-            </a:r>
+            <a:endParaRPr lang="en-US" dirty="0"/>
           </a:p>
         </p:txBody>
       </p:sp>
@@ -2571,10 +2493,7 @@
           <a:bodyPr/>
           <a:lstStyle/>
           <a:p>
-            <a:r>
-              <a:rPr lang="en-US" dirty="0"/>
-              <a:t>The one-line summary of why Day 2 exists. Day 1 risk was information; Day 2 risk is action. Say the last line out loud — it is the cleanest framing of the transition anyone in the room will repeat afterwards.</a:t>
-            </a:r>
+            <a:endParaRPr lang="en-US" dirty="0"/>
           </a:p>
         </p:txBody>
       </p:sp>
@@ -2658,10 +2577,7 @@
           <a:bodyPr/>
           <a:lstStyle/>
           <a:p>
-            <a:r>
-              <a:rPr lang="en-US" dirty="0"/>
-              <a:t>Show both halves, the offer and the request. Note the description field, because M6 attacks exactly that: the model chooses which tool to call largely by reading prose we supplied. To_account is a string says nothing about whether this user may send money there.</a:t>
-            </a:r>
+            <a:endParaRPr lang="en-US" dirty="0"/>
           </a:p>
         </p:txBody>
       </p:sp>
@@ -2745,10 +2661,7 @@
           <a:bodyPr/>
           <a:lstStyle/>
           <a:p>
-            <a:r>
-              <a:rPr lang="en-US" dirty="0"/>
-              <a:t>Name the pattern since they will meet it everywhere. The step cap is a real safety control: unbounded loops burn money and thrash. But eight steps is plenty to drain an account.</a:t>
-            </a:r>
+            <a:endParaRPr lang="en-US" dirty="0"/>
           </a:p>
         </p:txBody>
       </p:sp>
@@ -3381,7 +3294,7 @@
         </p:spPr>
         <p:txBody>
           <a:bodyPr wrap="square" lIns="25400" tIns="25400" rIns="25400" bIns="25400" rtlCol="0" anchor="t">
-            <a:normAutofit/>
+            <a:normAutofit lnSpcReduction="10000"/>
           </a:bodyPr>
           <a:lstStyle/>
           <a:p>
@@ -3425,7 +3338,7 @@
         </p:spPr>
         <p:txBody>
           <a:bodyPr wrap="square" lIns="25400" tIns="25400" rIns="25400" bIns="25400" rtlCol="0" anchor="t">
-            <a:normAutofit/>
+            <a:normAutofit lnSpcReduction="10000"/>
           </a:bodyPr>
           <a:lstStyle/>
           <a:p>
@@ -3613,7 +3526,7 @@
         </p:spPr>
         <p:txBody>
           <a:bodyPr wrap="square" lIns="25400" tIns="25400" rIns="25400" bIns="25400" rtlCol="0" anchor="t">
-            <a:normAutofit/>
+            <a:normAutofit lnSpcReduction="10000"/>
           </a:bodyPr>
           <a:lstStyle/>
           <a:p>
@@ -3647,7 +3560,7 @@
         <p:spPr>
           <a:xfrm>
             <a:off x="990600" y="4290566"/>
-            <a:ext cx="16306800" cy="1971154"/>
+            <a:ext cx="16306800" cy="3954274"/>
           </a:xfrm>
           <a:prstGeom prst="roundRect">
             <a:avLst>
@@ -3670,7 +3583,7 @@
           <a:bodyPr/>
           <a:lstStyle/>
           <a:p>
-            <a:endParaRPr lang="en-US"/>
+            <a:endParaRPr lang="en-US" sz="2400" dirty="0"/>
           </a:p>
         </p:txBody>
       </p:sp>
@@ -3844,18 +3757,12 @@
         </p:spPr>
         <p:txBody>
           <a:bodyPr wrap="square" lIns="25400" tIns="25400" rIns="25400" bIns="25400" rtlCol="0" anchor="t">
-            <a:normAutofit/>
-          </a:bodyPr>
-          <a:lstStyle/>
-          <a:p>
-            <a:pPr marL="0" indent="0" algn="l">
-              <a:lnSpc>
-                <a:spcPct val="144375"/>
-              </a:lnSpc>
-              <a:buNone/>
-            </a:pPr>
-            <a:r>
-              <a:rPr lang="en-US" sz="1575" dirty="0">
+            <a:noAutofit/>
+          </a:bodyPr>
+          <a:lstStyle/>
+          <a:p>
+            <a:r>
+              <a:rPr lang="en-US" sz="2400" dirty="0">
                 <a:solidFill>
                   <a:srgbClr val="C8C8C8"/>
                 </a:solidFill>
@@ -3863,21 +3770,25 @@
                 <a:ea typeface="Courier New" pitchFamily="34" charset="-122"/>
                 <a:cs typeface="Courier New" pitchFamily="34" charset="-120"/>
               </a:rPr>
-              <a:t>get_balance(account)                 get_account_details(account)      </a:t>
-            </a:r>
-            <a:r>
-              <a:rPr lang="en-US" sz="1575" dirty="0">
-                <a:solidFill>
-                  <a:srgbClr val="36CDFF"/>
+              <a:t>get_balance(account)                 get_account_details(account)      [read]</a:t>
+            </a:r>
+          </a:p>
+          <a:p>
+            <a:r>
+              <a:rPr lang="en-US" sz="2400" dirty="0">
+                <a:solidFill>
+                  <a:srgbClr val="C8C8C8"/>
                 </a:solidFill>
                 <a:latin typeface="Courier New" pitchFamily="34" charset="0"/>
                 <a:ea typeface="Courier New" pitchFamily="34" charset="-122"/>
                 <a:cs typeface="Courier New" pitchFamily="34" charset="-120"/>
               </a:rPr>
-              <a:t>[read] </a:t>
-            </a:r>
-            <a:r>
-              <a:rPr lang="en-US" sz="1575" dirty="0">
+              <a:t>transfer_funds(to_account, amount)   issue_refund(to_account, amount)  [money]</a:t>
+            </a:r>
+          </a:p>
+          <a:p>
+            <a:r>
+              <a:rPr lang="en-US" sz="2400" dirty="0">
                 <a:solidFill>
                   <a:srgbClr val="C8C8C8"/>
                 </a:solidFill>
@@ -3885,42 +3796,8 @@
                 <a:ea typeface="Courier New" pitchFamily="34" charset="-122"/>
                 <a:cs typeface="Courier New" pitchFamily="34" charset="-120"/>
               </a:rPr>
-              <a:t>transfer_funds(to_account, amount)   issue_refund(to_account, amount)  </a:t>
-            </a:r>
-            <a:r>
-              <a:rPr lang="en-US" sz="1575" dirty="0">
-                <a:solidFill>
-                  <a:srgbClr val="FD7EF5"/>
-                </a:solidFill>
-                <a:latin typeface="Courier New" pitchFamily="34" charset="0"/>
-                <a:ea typeface="Courier New" pitchFamily="34" charset="-122"/>
-                <a:cs typeface="Courier New" pitchFamily="34" charset="-120"/>
-              </a:rPr>
-              <a:t>[money] </a:t>
-            </a:r>
-            <a:r>
-              <a:rPr lang="en-US" sz="1575" dirty="0">
-                <a:solidFill>
-                  <a:srgbClr val="C8C8C8"/>
-                </a:solidFill>
-                <a:latin typeface="Courier New" pitchFamily="34" charset="0"/>
-                <a:ea typeface="Courier New" pitchFamily="34" charset="-122"/>
-                <a:cs typeface="Courier New" pitchFamily="34" charset="-120"/>
-              </a:rPr>
-              <a:t>update_email(account, email)                                           </a:t>
-            </a:r>
-            <a:r>
-              <a:rPr lang="en-US" sz="1575" dirty="0">
-                <a:solidFill>
-                  <a:srgbClr val="FD7EF5"/>
-                </a:solidFill>
-                <a:latin typeface="Courier New" pitchFamily="34" charset="0"/>
-                <a:ea typeface="Courier New" pitchFamily="34" charset="-122"/>
-                <a:cs typeface="Courier New" pitchFamily="34" charset="-120"/>
-              </a:rPr>
-              <a:t>[takeover]</a:t>
-            </a:r>
-            <a:endParaRPr lang="en-US" sz="1575" dirty="0"/>
+              <a:t>update_email(account, email)                                           [takeover]</a:t>
+            </a:r>
           </a:p>
         </p:txBody>
       </p:sp>
@@ -3932,7 +3809,7 @@
         </p:nvSpPr>
         <p:spPr>
           <a:xfrm>
-            <a:off x="990600" y="6585570"/>
+            <a:off x="990600" y="8506793"/>
             <a:ext cx="17811750" cy="443359"/>
           </a:xfrm>
           <a:prstGeom prst="rect">
@@ -4159,7 +4036,7 @@
         </p:spPr>
         <p:txBody>
           <a:bodyPr wrap="square" lIns="25400" tIns="25400" rIns="25400" bIns="25400" rtlCol="0" anchor="t">
-            <a:normAutofit/>
+            <a:normAutofit lnSpcReduction="10000"/>
           </a:bodyPr>
           <a:lstStyle/>
           <a:p>
@@ -4192,8 +4069,8 @@
         </p:nvSpPr>
         <p:spPr>
           <a:xfrm>
-            <a:off x="990600" y="4209604"/>
-            <a:ext cx="16306800" cy="2065362"/>
+            <a:off x="990600" y="4209603"/>
+            <a:ext cx="16306800" cy="4260057"/>
           </a:xfrm>
           <a:prstGeom prst="roundRect">
             <a:avLst>
@@ -4390,29 +4267,25 @@
         </p:spPr>
         <p:txBody>
           <a:bodyPr wrap="square" lIns="25400" tIns="25400" rIns="25400" bIns="25400" rtlCol="0" anchor="t">
-            <a:normAutofit/>
-          </a:bodyPr>
-          <a:lstStyle/>
-          <a:p>
-            <a:pPr marL="0" indent="0" algn="l">
-              <a:lnSpc>
-                <a:spcPct val="145962"/>
-              </a:lnSpc>
-              <a:buNone/>
-            </a:pPr>
-            <a:r>
-              <a:rPr lang="en-US" sz="1725" dirty="0">
-                <a:solidFill>
-                  <a:srgbClr val="36CDFF"/>
+            <a:noAutofit/>
+          </a:bodyPr>
+          <a:lstStyle/>
+          <a:p>
+            <a:r>
+              <a:rPr lang="en-US" sz="2400" dirty="0">
+                <a:solidFill>
+                  <a:srgbClr val="C8C8C8"/>
                 </a:solidFill>
                 <a:latin typeface="Courier New" pitchFamily="34" charset="0"/>
                 <a:ea typeface="Courier New" pitchFamily="34" charset="-122"/>
                 <a:cs typeface="Courier New" pitchFamily="34" charset="-120"/>
               </a:rPr>
-              <a:t>acct-me</a:t>
-            </a:r>
-            <a:r>
-              <a:rPr lang="en-US" sz="1725" dirty="0">
+              <a:t>acct-me        owner = you         balance 1000</a:t>
+            </a:r>
+          </a:p>
+          <a:p>
+            <a:r>
+              <a:rPr lang="en-US" sz="2400" dirty="0">
                 <a:solidFill>
                   <a:srgbClr val="C8C8C8"/>
                 </a:solidFill>
@@ -4420,119 +4293,21 @@
                 <a:ea typeface="Courier New" pitchFamily="34" charset="-122"/>
                 <a:cs typeface="Courier New" pitchFamily="34" charset="-120"/>
               </a:rPr>
-              <a:t>        owner = you         balance 1000 </a:t>
-            </a:r>
-            <a:r>
-              <a:rPr lang="en-US" sz="1725" dirty="0">
-                <a:solidFill>
-                  <a:srgbClr val="FD7EF5"/>
+              <a:t>acct-victim    owner = "victim"    balance 5000</a:t>
+            </a:r>
+          </a:p>
+          <a:p>
+            <a:r>
+              <a:rPr lang="en-US" sz="2400" dirty="0">
+                <a:solidFill>
+                  <a:srgbClr val="C8C8C8"/>
                 </a:solidFill>
                 <a:latin typeface="Courier New" pitchFamily="34" charset="0"/>
                 <a:ea typeface="Courier New" pitchFamily="34" charset="-122"/>
                 <a:cs typeface="Courier New" pitchFamily="34" charset="-120"/>
               </a:rPr>
-              <a:t>acct-victim</a:t>
-            </a:r>
-            <a:r>
-              <a:rPr lang="en-US" sz="1725" dirty="0">
-                <a:solidFill>
-                  <a:srgbClr val="C8C8C8"/>
-                </a:solidFill>
-                <a:latin typeface="Courier New" pitchFamily="34" charset="0"/>
-                <a:ea typeface="Courier New" pitchFamily="34" charset="-122"/>
-                <a:cs typeface="Courier New" pitchFamily="34" charset="-120"/>
-              </a:rPr>
-              <a:t>    owner = "victim"    balance 5000 </a:t>
-            </a:r>
-            <a:r>
-              <a:rPr lang="en-US" sz="1725" dirty="0">
-                <a:solidFill>
-                  <a:srgbClr val="FD7EF5"/>
-                </a:solidFill>
-                <a:latin typeface="Courier New" pitchFamily="34" charset="0"/>
-                <a:ea typeface="Courier New" pitchFamily="34" charset="-122"/>
-                <a:cs typeface="Courier New" pitchFamily="34" charset="-120"/>
-              </a:rPr>
-              <a:t>acct-attacker</a:t>
-            </a:r>
-            <a:r>
-              <a:rPr lang="en-US" sz="1725" dirty="0">
-                <a:solidFill>
-                  <a:srgbClr val="C8C8C8"/>
-                </a:solidFill>
-                <a:latin typeface="Courier New" pitchFamily="34" charset="0"/>
-                <a:ea typeface="Courier New" pitchFamily="34" charset="-122"/>
-                <a:cs typeface="Courier New" pitchFamily="34" charset="-120"/>
-              </a:rPr>
-              <a:t>  owner = "attacker"  balance 0      email attacker@evil.test</a:t>
-            </a:r>
-            <a:endParaRPr lang="en-US" sz="1725" dirty="0"/>
-          </a:p>
-        </p:txBody>
-      </p:sp>
-      <p:sp>
-        <p:nvSpPr>
-          <p:cNvPr id="11" name="Text 9"/>
-          <p:cNvSpPr/>
-          <p:nvPr/>
-        </p:nvSpPr>
-        <p:spPr>
-          <a:xfrm>
-            <a:off x="990600" y="6598816"/>
-            <a:ext cx="17811750" cy="443359"/>
-          </a:xfrm>
-          <a:prstGeom prst="rect">
-            <a:avLst/>
-          </a:prstGeom>
-          <a:noFill/>
-          <a:ln/>
-        </p:spPr>
-        <p:txBody>
-          <a:bodyPr wrap="square" lIns="25400" tIns="25400" rIns="25400" bIns="25400" rtlCol="0" anchor="t">
-            <a:normAutofit/>
-          </a:bodyPr>
-          <a:lstStyle/>
-          <a:p>
-            <a:pPr marL="0" indent="0" algn="l">
-              <a:lnSpc>
-                <a:spcPct val="125522"/>
-              </a:lnSpc>
-              <a:buNone/>
-            </a:pPr>
-            <a:r>
-              <a:rPr lang="en-US" sz="2175" dirty="0">
-                <a:solidFill>
-                  <a:srgbClr val="FFFFFF"/>
-                </a:solidFill>
-                <a:latin typeface="Arial" pitchFamily="34" charset="0"/>
-                <a:ea typeface="Arial" pitchFamily="34" charset="-122"/>
-                <a:cs typeface="Arial" pitchFamily="34" charset="-120"/>
-              </a:rPr>
-              <a:t>The model has </a:t>
-            </a:r>
-            <a:r>
-              <a:rPr lang="en-US" sz="2175" b="1" dirty="0">
-                <a:solidFill>
-                  <a:srgbClr val="FD7EF5"/>
-                </a:solidFill>
-                <a:latin typeface="Arial" pitchFamily="34" charset="0"/>
-                <a:ea typeface="Arial" pitchFamily="34" charset="-122"/>
-                <a:cs typeface="Arial" pitchFamily="34" charset="-120"/>
-              </a:rPr>
-              <a:t>no idea </a:t>
-            </a:r>
-            <a:r>
-              <a:rPr lang="en-US" sz="2175" dirty="0">
-                <a:solidFill>
-                  <a:srgbClr val="FFFFFF"/>
-                </a:solidFill>
-                <a:latin typeface="Arial" pitchFamily="34" charset="0"/>
-                <a:ea typeface="Arial" pitchFamily="34" charset="-122"/>
-                <a:cs typeface="Arial" pitchFamily="34" charset="-120"/>
-              </a:rPr>
-              <a:t>that matters.</a:t>
-            </a:r>
-            <a:endParaRPr lang="en-US" sz="2175" dirty="0"/>
+              <a:t>acct-attacker  owner = "attacker"  balance 0      email attacker@evil.test</a:t>
+            </a:r>
           </a:p>
         </p:txBody>
       </p:sp>
@@ -4764,7 +4539,7 @@
         </p:spPr>
         <p:txBody>
           <a:bodyPr wrap="square" lIns="25400" tIns="25400" rIns="25400" bIns="25400" rtlCol="0" anchor="t">
-            <a:normAutofit/>
+            <a:normAutofit lnSpcReduction="10000"/>
           </a:bodyPr>
           <a:lstStyle/>
           <a:p>
@@ -4797,8 +4572,8 @@
         </p:nvSpPr>
         <p:spPr>
           <a:xfrm>
-            <a:off x="990600" y="3999756"/>
-            <a:ext cx="16306800" cy="2552700"/>
+            <a:off x="990600" y="3999755"/>
+            <a:ext cx="16306800" cy="3603127"/>
           </a:xfrm>
           <a:prstGeom prst="roundRect">
             <a:avLst>
@@ -4995,18 +4770,12 @@
         </p:spPr>
         <p:txBody>
           <a:bodyPr wrap="square" lIns="25400" tIns="25400" rIns="25400" bIns="25400" rtlCol="0" anchor="t">
-            <a:normAutofit/>
-          </a:bodyPr>
-          <a:lstStyle/>
-          <a:p>
-            <a:pPr marL="0" indent="0" algn="l">
-              <a:lnSpc>
-                <a:spcPct val="146667"/>
-              </a:lnSpc>
-              <a:buNone/>
-            </a:pPr>
-            <a:r>
-              <a:rPr lang="en-US" sz="1500" dirty="0">
+            <a:noAutofit/>
+          </a:bodyPr>
+          <a:lstStyle/>
+          <a:p>
+            <a:r>
+              <a:rPr lang="en-US" sz="2400" dirty="0">
                 <a:solidFill>
                   <a:srgbClr val="C8C8C8"/>
                 </a:solidFill>
@@ -5016,17 +4785,10 @@
               </a:rPr>
               <a:t>step = llm.next_step(messages, tools_mod.SCHEMAS)</a:t>
             </a:r>
-            <a:endParaRPr lang="en-US" sz="1500" dirty="0"/>
-          </a:p>
-          <a:p>
-            <a:pPr marL="0" indent="0" algn="l">
-              <a:lnSpc>
-                <a:spcPct val="146667"/>
-              </a:lnSpc>
-              <a:buNone/>
-            </a:pPr>
-            <a:r>
-              <a:rPr lang="en-US" sz="1500" dirty="0">
+          </a:p>
+          <a:p>
+            <a:r>
+              <a:rPr lang="en-US" sz="2400" dirty="0">
                 <a:solidFill>
                   <a:srgbClr val="C8C8C8"/>
                 </a:solidFill>
@@ -5036,17 +4798,10 @@
               </a:rPr>
               <a:t>if isinstance(step, FinalAnswer):</a:t>
             </a:r>
-            <a:endParaRPr lang="en-US" sz="1500" dirty="0"/>
-          </a:p>
-          <a:p>
-            <a:pPr marL="0" indent="0" algn="l">
-              <a:lnSpc>
-                <a:spcPct val="146667"/>
-              </a:lnSpc>
-              <a:buNone/>
-            </a:pPr>
-            <a:r>
-              <a:rPr lang="en-US" sz="1500" dirty="0">
+          </a:p>
+          <a:p>
+            <a:r>
+              <a:rPr lang="en-US" sz="2400" dirty="0">
                 <a:solidFill>
                   <a:srgbClr val="C8C8C8"/>
                 </a:solidFill>
@@ -5056,17 +4811,10 @@
               </a:rPr>
               <a:t>    return step.text, calls</a:t>
             </a:r>
-            <a:endParaRPr lang="en-US" sz="1500" dirty="0"/>
-          </a:p>
-          <a:p>
-            <a:pPr marL="0" indent="0" algn="l">
-              <a:lnSpc>
-                <a:spcPct val="146667"/>
-              </a:lnSpc>
-              <a:buNone/>
-            </a:pPr>
-            <a:r>
-              <a:rPr lang="en-US" sz="1500" dirty="0">
+          </a:p>
+          <a:p>
+            <a:r>
+              <a:rPr lang="en-US" sz="2400" dirty="0">
                 <a:solidFill>
                   <a:srgbClr val="C8C8C8"/>
                 </a:solidFill>
@@ -5074,19 +4822,12 @@
                 <a:ea typeface="Courier New" pitchFamily="34" charset="-122"/>
                 <a:cs typeface="Courier New" pitchFamily="34" charset="-120"/>
               </a:rPr>
-              <a:t>result = tools_mod.execute(step.name, session_id, step.args, bank, store, settings) </a:t>
-            </a:r>
-            <a:endParaRPr lang="en-US" sz="1500" dirty="0"/>
-          </a:p>
-          <a:p>
-            <a:pPr marL="0" indent="0" algn="l">
-              <a:lnSpc>
-                <a:spcPct val="146667"/>
-              </a:lnSpc>
-              <a:buNone/>
-            </a:pPr>
-            <a:r>
-              <a:rPr lang="en-US" sz="1500" dirty="0">
+              <a:t>result = tools_mod.execute(step.name, session_id, step.args, bank, store, settings)</a:t>
+            </a:r>
+          </a:p>
+          <a:p>
+            <a:r>
+              <a:rPr lang="en-US" sz="2400" dirty="0">
                 <a:solidFill>
                   <a:srgbClr val="FD7EF5"/>
                 </a:solidFill>
@@ -5094,9 +4835,8 @@
                 <a:ea typeface="Courier New" pitchFamily="34" charset="-122"/>
                 <a:cs typeface="Courier New" pitchFamily="34" charset="-120"/>
               </a:rPr>
-              <a:t>#        +-- just runs whatever the model picked</a:t>
-            </a:r>
-            <a:endParaRPr lang="en-US" sz="1500" dirty="0"/>
+              <a:t>#        └── just runs whatever the model picked</a:t>
+            </a:r>
           </a:p>
         </p:txBody>
       </p:sp>
@@ -5108,7 +4848,7 @@
         </p:nvSpPr>
         <p:spPr>
           <a:xfrm>
-            <a:off x="990600" y="6876306"/>
+            <a:off x="990600" y="8285112"/>
             <a:ext cx="17811750" cy="443359"/>
           </a:xfrm>
           <a:prstGeom prst="rect">
@@ -5324,7 +5064,7 @@
         </p:spPr>
         <p:txBody>
           <a:bodyPr wrap="square" lIns="25400" tIns="25400" rIns="25400" bIns="25400" rtlCol="0" anchor="t">
-            <a:normAutofit/>
+            <a:normAutofit lnSpcReduction="10000"/>
           </a:bodyPr>
           <a:lstStyle/>
           <a:p>
@@ -5358,7 +5098,7 @@
         <p:spPr>
           <a:xfrm>
             <a:off x="990600" y="3335387"/>
-            <a:ext cx="16306800" cy="3369469"/>
+            <a:ext cx="16306800" cy="5832425"/>
           </a:xfrm>
           <a:prstGeom prst="roundRect">
             <a:avLst>
@@ -5555,18 +5295,12 @@
         </p:spPr>
         <p:txBody>
           <a:bodyPr wrap="square" lIns="25400" tIns="25400" rIns="25400" bIns="25400" rtlCol="0" anchor="t">
-            <a:normAutofit/>
-          </a:bodyPr>
-          <a:lstStyle/>
-          <a:p>
-            <a:pPr marL="0" indent="0" algn="l">
-              <a:lnSpc>
-                <a:spcPct val="145814"/>
-              </a:lnSpc>
-              <a:buNone/>
-            </a:pPr>
-            <a:r>
-              <a:rPr lang="en-US" sz="1425" dirty="0">
+            <a:noAutofit/>
+          </a:bodyPr>
+          <a:lstStyle/>
+          <a:p>
+            <a:r>
+              <a:rPr lang="en-US" sz="2200" dirty="0">
                 <a:solidFill>
                   <a:srgbClr val="C8C8C8"/>
                 </a:solidFill>
@@ -5576,17 +5310,10 @@
               </a:rPr>
               <a:t>def authorize_tool_call(session_id, tool_name, args, bank, settings):</a:t>
             </a:r>
-            <a:endParaRPr lang="en-US" sz="1425" dirty="0"/>
-          </a:p>
-          <a:p>
-            <a:pPr marL="0" indent="0" algn="l">
-              <a:lnSpc>
-                <a:spcPct val="145814"/>
-              </a:lnSpc>
-              <a:buNone/>
-            </a:pPr>
-            <a:r>
-              <a:rPr lang="en-US" sz="1425" dirty="0">
+          </a:p>
+          <a:p>
+            <a:r>
+              <a:rPr lang="en-US" sz="2200" dirty="0">
                 <a:solidFill>
                   <a:srgbClr val="C8C8C8"/>
                 </a:solidFill>
@@ -5596,17 +5323,10 @@
               </a:rPr>
               <a:t>    if not settings.sec_tool_scope_enforcement:</a:t>
             </a:r>
-            <a:endParaRPr lang="en-US" sz="1425" dirty="0"/>
-          </a:p>
-          <a:p>
-            <a:pPr marL="0" indent="0" algn="l">
-              <a:lnSpc>
-                <a:spcPct val="145814"/>
-              </a:lnSpc>
-              <a:buNone/>
-            </a:pPr>
-            <a:r>
-              <a:rPr lang="en-US" sz="1425" dirty="0">
+          </a:p>
+          <a:p>
+            <a:r>
+              <a:rPr lang="en-US" sz="2200" dirty="0">
                 <a:solidFill>
                   <a:srgbClr val="C8C8C8"/>
                 </a:solidFill>
@@ -5614,19 +5334,10 @@
                 <a:ea typeface="Courier New" pitchFamily="34" charset="-122"/>
                 <a:cs typeface="Courier New" pitchFamily="34" charset="-120"/>
               </a:rPr>
-              <a:t>        return True                       </a:t>
-            </a:r>
-            <a:endParaRPr lang="en-US" sz="1425" dirty="0"/>
-          </a:p>
-          <a:p>
-            <a:pPr marL="0" indent="0" algn="l">
-              <a:lnSpc>
-                <a:spcPct val="145814"/>
-              </a:lnSpc>
-              <a:buNone/>
-            </a:pPr>
-            <a:r>
-              <a:rPr lang="en-US" sz="1425" dirty="0">
+              <a:t>        return True                      </a:t>
+            </a:r>
+            <a:r>
+              <a:rPr lang="en-US" sz="2200" dirty="0">
                 <a:solidFill>
                   <a:srgbClr val="FD7EF5"/>
                 </a:solidFill>
@@ -5634,10 +5345,12 @@
                 <a:ea typeface="Courier New" pitchFamily="34" charset="-122"/>
                 <a:cs typeface="Courier New" pitchFamily="34" charset="-120"/>
               </a:rPr>
-              <a:t># VULNERABLE: allow everything </a:t>
-            </a:r>
-            <a:r>
-              <a:rPr lang="en-US" sz="1425" dirty="0">
+              <a:t># VULNERABLE: allow everything</a:t>
+            </a:r>
+          </a:p>
+          <a:p>
+            <a:r>
+              <a:rPr lang="en-US" sz="2200" dirty="0">
                 <a:solidFill>
                   <a:srgbClr val="C8C8C8"/>
                 </a:solidFill>
@@ -5647,17 +5360,10 @@
               </a:rPr>
               <a:t>    if tool_name in {"transfer_funds", "issue_refund"}:</a:t>
             </a:r>
-            <a:endParaRPr lang="en-US" sz="1425" dirty="0"/>
-          </a:p>
-          <a:p>
-            <a:pPr marL="0" indent="0" algn="l">
-              <a:lnSpc>
-                <a:spcPct val="145814"/>
-              </a:lnSpc>
-              <a:buNone/>
-            </a:pPr>
-            <a:r>
-              <a:rPr lang="en-US" sz="1425" dirty="0">
+          </a:p>
+          <a:p>
+            <a:r>
+              <a:rPr lang="en-US" sz="2200" dirty="0">
                 <a:solidFill>
                   <a:srgbClr val="C8C8C8"/>
                 </a:solidFill>
@@ -5665,30 +5371,25 @@
                 <a:ea typeface="Courier New" pitchFamily="34" charset="-122"/>
                 <a:cs typeface="Courier New" pitchFamily="34" charset="-120"/>
               </a:rPr>
-              <a:t>        return  </a:t>
-            </a:r>
-            <a:endParaRPr lang="en-US" sz="1425" dirty="0"/>
-          </a:p>
-          <a:p>
-            <a:pPr marL="0" indent="0" algn="l">
-              <a:lnSpc>
-                <a:spcPct val="145814"/>
-              </a:lnSpc>
-              <a:buNone/>
-            </a:pPr>
-            <a:r>
-              <a:rPr lang="en-US" sz="1425" dirty="0">
-                <a:solidFill>
-                  <a:srgbClr val="36CDFF"/>
+              <a:t>        return bank.owns(session_id, str(args.get("to_account", "")))</a:t>
+            </a:r>
+          </a:p>
+          <a:p>
+            <a:r>
+              <a:rPr lang="en-US" sz="2200" dirty="0">
+                <a:solidFill>
+                  <a:srgbClr val="C8C8C8"/>
                 </a:solidFill>
                 <a:latin typeface="Courier New" pitchFamily="34" charset="0"/>
                 <a:ea typeface="Courier New" pitchFamily="34" charset="-122"/>
                 <a:cs typeface="Courier New" pitchFamily="34" charset="-120"/>
               </a:rPr>
-              <a:t>bank.owns(session_id, str(args.get("to_account", ""))) </a:t>
-            </a:r>
-            <a:r>
-              <a:rPr lang="en-US" sz="1425" dirty="0">
+              <a:t>    if tool_name == "update_email":</a:t>
+            </a:r>
+          </a:p>
+          <a:p>
+            <a:r>
+              <a:rPr lang="en-US" sz="2200" dirty="0">
                 <a:solidFill>
                   <a:srgbClr val="C8C8C8"/>
                 </a:solidFill>
@@ -5696,19 +5397,12 @@
                 <a:ea typeface="Courier New" pitchFamily="34" charset="-122"/>
                 <a:cs typeface="Courier New" pitchFamily="34" charset="-120"/>
               </a:rPr>
-              <a:t>    if tool_name == "update_email":</a:t>
-            </a:r>
-            <a:endParaRPr lang="en-US" sz="1425" dirty="0"/>
-          </a:p>
-          <a:p>
-            <a:pPr marL="0" indent="0" algn="l">
-              <a:lnSpc>
-                <a:spcPct val="145814"/>
-              </a:lnSpc>
-              <a:buNone/>
-            </a:pPr>
-            <a:r>
-              <a:rPr lang="en-US" sz="1425" dirty="0">
+              <a:t>        return bank.owns(session_id, str(args.get("account", "")))</a:t>
+            </a:r>
+          </a:p>
+          <a:p>
+            <a:r>
+              <a:rPr lang="en-US" sz="2200" dirty="0">
                 <a:solidFill>
                   <a:srgbClr val="C8C8C8"/>
                 </a:solidFill>
@@ -5716,29 +5410,8 @@
                 <a:ea typeface="Courier New" pitchFamily="34" charset="-122"/>
                 <a:cs typeface="Courier New" pitchFamily="34" charset="-120"/>
               </a:rPr>
-              <a:t>        return bank.owns(session_id, str(args.get("account", "")))</a:t>
-            </a:r>
-            <a:endParaRPr lang="en-US" sz="1425" dirty="0"/>
-          </a:p>
-          <a:p>
-            <a:pPr marL="0" indent="0" algn="l">
-              <a:lnSpc>
-                <a:spcPct val="145814"/>
-              </a:lnSpc>
-              <a:buNone/>
-            </a:pPr>
-            <a:r>
-              <a:rPr lang="en-US" sz="1425" dirty="0">
-                <a:solidFill>
-                  <a:srgbClr val="C8C8C8"/>
-                </a:solidFill>
-                <a:latin typeface="Courier New" pitchFamily="34" charset="0"/>
-                <a:ea typeface="Courier New" pitchFamily="34" charset="-122"/>
-                <a:cs typeface="Courier New" pitchFamily="34" charset="-120"/>
-              </a:rPr>
               <a:t>    return True</a:t>
             </a:r>
-            <a:endParaRPr lang="en-US" sz="1425" dirty="0"/>
           </a:p>
         </p:txBody>
       </p:sp>
@@ -5750,7 +5423,7 @@
         </p:nvSpPr>
         <p:spPr>
           <a:xfrm>
-            <a:off x="990600" y="7028706"/>
+            <a:off x="1000125" y="8391823"/>
             <a:ext cx="16678275" cy="853380"/>
           </a:xfrm>
           <a:prstGeom prst="rect">
@@ -5761,7 +5434,7 @@
         </p:spPr>
         <p:txBody>
           <a:bodyPr wrap="square" lIns="25400" tIns="25400" rIns="25400" bIns="25400" rtlCol="0" anchor="t">
-            <a:normAutofit/>
+            <a:normAutofit lnSpcReduction="10000"/>
           </a:bodyPr>
           <a:lstStyle/>
           <a:p>
@@ -5988,7 +5661,7 @@
         </p:spPr>
         <p:txBody>
           <a:bodyPr wrap="square" lIns="25400" tIns="25400" rIns="25400" bIns="25400" rtlCol="0" anchor="t">
-            <a:normAutofit/>
+            <a:normAutofit lnSpcReduction="10000"/>
           </a:bodyPr>
           <a:lstStyle/>
           <a:p>
@@ -6021,8 +5694,8 @@
         </p:nvSpPr>
         <p:spPr>
           <a:xfrm>
-            <a:off x="990600" y="4031679"/>
-            <a:ext cx="16306800" cy="2301180"/>
+            <a:off x="990600" y="4031678"/>
+            <a:ext cx="16306800" cy="3877881"/>
           </a:xfrm>
           <a:prstGeom prst="roundRect">
             <a:avLst>
@@ -6219,18 +5892,12 @@
         </p:spPr>
         <p:txBody>
           <a:bodyPr wrap="square" lIns="25400" tIns="25400" rIns="25400" bIns="25400" rtlCol="0" anchor="t">
-            <a:normAutofit/>
-          </a:bodyPr>
-          <a:lstStyle/>
-          <a:p>
-            <a:pPr marL="0" indent="0" algn="l">
-              <a:lnSpc>
-                <a:spcPct val="144375"/>
-              </a:lnSpc>
-              <a:buNone/>
-            </a:pPr>
-            <a:r>
-              <a:rPr lang="en-US" sz="1575" dirty="0">
+            <a:noAutofit/>
+          </a:bodyPr>
+          <a:lstStyle/>
+          <a:p>
+            <a:r>
+              <a:rPr lang="en-US" sz="2400" dirty="0">
                 <a:solidFill>
                   <a:srgbClr val="C8C8C8"/>
                 </a:solidFill>
@@ -6240,17 +5907,10 @@
               </a:rPr>
               <a:t>if not bank.owns(session_id, to):</a:t>
             </a:r>
-            <a:endParaRPr lang="en-US" sz="1575" dirty="0"/>
-          </a:p>
-          <a:p>
-            <a:pPr marL="0" indent="0" algn="l">
-              <a:lnSpc>
-                <a:spcPct val="144375"/>
-              </a:lnSpc>
-              <a:buNone/>
-            </a:pPr>
-            <a:r>
-              <a:rPr lang="en-US" sz="1575" dirty="0">
+          </a:p>
+          <a:p>
+            <a:r>
+              <a:rPr lang="en-US" sz="2400" dirty="0">
                 <a:solidFill>
                   <a:srgbClr val="C8C8C8"/>
                 </a:solidFill>
@@ -6260,17 +5920,8 @@
               </a:rPr>
               <a:t>    audit.record(..., UNAUTHORIZED_TOOL_CALL, ...)   </a:t>
             </a:r>
-            <a:endParaRPr lang="en-US" sz="1575" dirty="0"/>
-          </a:p>
-          <a:p>
-            <a:pPr marL="0" indent="0" algn="l">
-              <a:lnSpc>
-                <a:spcPct val="144375"/>
-              </a:lnSpc>
-              <a:buNone/>
-            </a:pPr>
-            <a:r>
-              <a:rPr lang="en-US" sz="1575" dirty="0">
+            <a:r>
+              <a:rPr lang="en-US" sz="2400" dirty="0">
                 <a:solidFill>
                   <a:srgbClr val="36CDFF"/>
                 </a:solidFill>
@@ -6278,10 +5929,12 @@
                 <a:ea typeface="Courier New" pitchFamily="34" charset="-122"/>
                 <a:cs typeface="Courier New" pitchFamily="34" charset="-120"/>
               </a:rPr>
-              <a:t># log it </a:t>
-            </a:r>
-            <a:r>
-              <a:rPr lang="en-US" sz="1575" dirty="0">
+              <a:t># log it</a:t>
+            </a:r>
+          </a:p>
+          <a:p>
+            <a:r>
+              <a:rPr lang="en-US" sz="2400" dirty="0">
                 <a:solidFill>
                   <a:srgbClr val="C8C8C8"/>
                 </a:solidFill>
@@ -6291,17 +5944,10 @@
               </a:rPr>
               <a:t>if bank.get(to) is not None:</a:t>
             </a:r>
-            <a:endParaRPr lang="en-US" sz="1575" dirty="0"/>
-          </a:p>
-          <a:p>
-            <a:pPr marL="0" indent="0" algn="l">
-              <a:lnSpc>
-                <a:spcPct val="144375"/>
-              </a:lnSpc>
-              <a:buNone/>
-            </a:pPr>
-            <a:r>
-              <a:rPr lang="en-US" sz="1575" dirty="0">
+          </a:p>
+          <a:p>
+            <a:r>
+              <a:rPr lang="en-US" sz="2400" dirty="0">
                 <a:solidFill>
                   <a:srgbClr val="C8C8C8"/>
                 </a:solidFill>
@@ -6311,19 +5957,10 @@
               </a:rPr>
               <a:t>    bank.credit(to, amount)                          </a:t>
             </a:r>
-            <a:endParaRPr lang="en-US" sz="1575" dirty="0"/>
-          </a:p>
-          <a:p>
-            <a:pPr marL="0" indent="0" algn="l">
-              <a:lnSpc>
-                <a:spcPct val="144375"/>
-              </a:lnSpc>
-              <a:buNone/>
-            </a:pPr>
-            <a:r>
-              <a:rPr lang="en-US" sz="1575" dirty="0">
-                <a:solidFill>
-                  <a:srgbClr val="FD7EF5"/>
+            <a:r>
+              <a:rPr lang="en-US" sz="2400" dirty="0">
+                <a:solidFill>
+                  <a:srgbClr val="36CDFF"/>
                 </a:solidFill>
                 <a:latin typeface="Courier New" pitchFamily="34" charset="0"/>
                 <a:ea typeface="Courier New" pitchFamily="34" charset="-122"/>
@@ -6331,7 +5968,6 @@
               </a:rPr>
               <a:t># ...and do it</a:t>
             </a:r>
-            <a:endParaRPr lang="en-US" sz="1575" dirty="0"/>
           </a:p>
         </p:txBody>
       </p:sp>
@@ -6343,7 +5979,7 @@
         </p:nvSpPr>
         <p:spPr>
           <a:xfrm>
-            <a:off x="990600" y="6656710"/>
+            <a:off x="990600" y="8234438"/>
             <a:ext cx="17811750" cy="443359"/>
           </a:xfrm>
           <a:prstGeom prst="rect">
@@ -6652,7 +6288,7 @@
         </p:spPr>
         <p:txBody>
           <a:bodyPr wrap="square" lIns="25400" tIns="25400" rIns="25400" bIns="25400" rtlCol="0" anchor="t">
-            <a:normAutofit/>
+            <a:normAutofit lnSpcReduction="10000"/>
           </a:bodyPr>
           <a:lstStyle/>
           <a:p>
@@ -6916,7 +6552,7 @@
         </p:nvSpPr>
         <p:spPr>
           <a:xfrm>
-            <a:off x="990600" y="3331592"/>
+            <a:off x="990600" y="3464213"/>
             <a:ext cx="17937480" cy="1066800"/>
           </a:xfrm>
           <a:prstGeom prst="rect">
@@ -6927,7 +6563,7 @@
         </p:spPr>
         <p:txBody>
           <a:bodyPr wrap="square" lIns="25400" tIns="25400" rIns="25400" bIns="25400" rtlCol="0" anchor="t">
-            <a:normAutofit/>
+            <a:normAutofit lnSpcReduction="10000"/>
           </a:bodyPr>
           <a:lstStyle/>
           <a:p>
@@ -7158,7 +6794,7 @@
         </p:spPr>
         <p:txBody>
           <a:bodyPr wrap="square" lIns="25400" tIns="25400" rIns="25400" bIns="25400" rtlCol="0" anchor="t">
-            <a:normAutofit/>
+            <a:normAutofit lnSpcReduction="10000"/>
           </a:bodyPr>
           <a:lstStyle/>
           <a:p>
@@ -7418,7 +7054,7 @@
         </p:spPr>
         <p:txBody>
           <a:bodyPr wrap="square" lIns="25400" tIns="25400" rIns="25400" bIns="25400" rtlCol="0" anchor="t">
-            <a:normAutofit/>
+            <a:normAutofit lnSpcReduction="10000"/>
           </a:bodyPr>
           <a:lstStyle/>
           <a:p>
@@ -7452,7 +7088,7 @@
         <p:spPr>
           <a:xfrm>
             <a:off x="990600" y="4271516"/>
-            <a:ext cx="16306800" cy="1971154"/>
+            <a:ext cx="16306800" cy="3592324"/>
           </a:xfrm>
           <a:prstGeom prst="roundRect">
             <a:avLst>
@@ -7649,18 +7285,12 @@
         </p:spPr>
         <p:txBody>
           <a:bodyPr wrap="square" lIns="25400" tIns="25400" rIns="25400" bIns="25400" rtlCol="0" anchor="t">
-            <a:normAutofit/>
-          </a:bodyPr>
-          <a:lstStyle/>
-          <a:p>
-            <a:pPr marL="0" indent="0" algn="l">
-              <a:lnSpc>
-                <a:spcPct val="144375"/>
-              </a:lnSpc>
-              <a:buNone/>
-            </a:pPr>
-            <a:r>
-              <a:rPr lang="en-US" sz="1575" dirty="0">
+            <a:noAutofit/>
+          </a:bodyPr>
+          <a:lstStyle/>
+          <a:p>
+            <a:r>
+              <a:rPr lang="en-US" sz="2400" dirty="0">
                 <a:solidFill>
                   <a:srgbClr val="C8C8C8"/>
                 </a:solidFill>
@@ -7670,17 +7300,10 @@
               </a:rPr>
               <a:t>{"reply": "I've issued your refund of $500 to acct-attacker.",</a:t>
             </a:r>
-            <a:endParaRPr lang="en-US" sz="1575" dirty="0"/>
-          </a:p>
-          <a:p>
-            <a:pPr marL="0" indent="0" algn="l">
-              <a:lnSpc>
-                <a:spcPct val="144375"/>
-              </a:lnSpc>
-              <a:buNone/>
-            </a:pPr>
-            <a:r>
-              <a:rPr lang="en-US" sz="1575" dirty="0">
+          </a:p>
+          <a:p>
+            <a:r>
+              <a:rPr lang="en-US" sz="2400" dirty="0">
                 <a:solidFill>
                   <a:srgbClr val="C8C8C8"/>
                 </a:solidFill>
@@ -7688,91 +7311,21 @@
                 <a:ea typeface="Courier New" pitchFamily="34" charset="-122"/>
                 <a:cs typeface="Courier New" pitchFamily="34" charset="-120"/>
               </a:rPr>
-              <a:t>  </a:t>
-            </a:r>
-            <a:endParaRPr lang="en-US" sz="1575" dirty="0"/>
-          </a:p>
-          <a:p>
-            <a:pPr marL="0" indent="0" algn="l">
-              <a:lnSpc>
-                <a:spcPct val="144375"/>
-              </a:lnSpc>
-              <a:buNone/>
-            </a:pPr>
-            <a:r>
-              <a:rPr lang="en-US" sz="1575" dirty="0">
-                <a:solidFill>
-                  <a:srgbClr val="FD7EF5"/>
+              <a:t> "tool_calls": [{"name": "issue_refund",</a:t>
+            </a:r>
+          </a:p>
+          <a:p>
+            <a:r>
+              <a:rPr lang="en-US" sz="2400" dirty="0">
+                <a:solidFill>
+                  <a:srgbClr val="C8C8C8"/>
                 </a:solidFill>
                 <a:latin typeface="Courier New" pitchFamily="34" charset="0"/>
                 <a:ea typeface="Courier New" pitchFamily="34" charset="-122"/>
                 <a:cs typeface="Courier New" pitchFamily="34" charset="-120"/>
               </a:rPr>
-              <a:t>"tool_calls" </a:t>
-            </a:r>
-            <a:r>
-              <a:rPr lang="en-US" sz="1575" dirty="0">
-                <a:solidFill>
-                  <a:srgbClr val="C8C8C8"/>
-                </a:solidFill>
-                <a:latin typeface="Courier New" pitchFamily="34" charset="0"/>
-                <a:ea typeface="Courier New" pitchFamily="34" charset="-122"/>
-                <a:cs typeface="Courier New" pitchFamily="34" charset="-120"/>
-              </a:rPr>
-              <a:t>: [{"name": "issue_refund",</a:t>
-            </a:r>
-            <a:endParaRPr lang="en-US" sz="1575" dirty="0"/>
-          </a:p>
-          <a:p>
-            <a:pPr marL="0" indent="0" algn="l">
-              <a:lnSpc>
-                <a:spcPct val="144375"/>
-              </a:lnSpc>
-              <a:buNone/>
-            </a:pPr>
-            <a:r>
-              <a:rPr lang="en-US" sz="1575" dirty="0">
-                <a:solidFill>
-                  <a:srgbClr val="C8C8C8"/>
-                </a:solidFill>
-                <a:latin typeface="Courier New" pitchFamily="34" charset="0"/>
-                <a:ea typeface="Courier New" pitchFamily="34" charset="-122"/>
-                <a:cs typeface="Courier New" pitchFamily="34" charset="-120"/>
-              </a:rPr>
-              <a:t>                 "args": {"to_account": </a:t>
-            </a:r>
-            <a:endParaRPr lang="en-US" sz="1575" dirty="0"/>
-          </a:p>
-          <a:p>
-            <a:pPr marL="0" indent="0" algn="l">
-              <a:lnSpc>
-                <a:spcPct val="144375"/>
-              </a:lnSpc>
-              <a:buNone/>
-            </a:pPr>
-            <a:r>
-              <a:rPr lang="en-US" sz="1575" dirty="0">
-                <a:solidFill>
-                  <a:srgbClr val="FD7EF5"/>
-                </a:solidFill>
-                <a:latin typeface="Courier New" pitchFamily="34" charset="0"/>
-                <a:ea typeface="Courier New" pitchFamily="34" charset="-122"/>
-                <a:cs typeface="Courier New" pitchFamily="34" charset="-120"/>
-              </a:rPr>
-              <a:t>"acct-attacker"</a:t>
-            </a:r>
-            <a:r>
-              <a:rPr lang="en-US" sz="1575" dirty="0">
-                <a:solidFill>
-                  <a:srgbClr val="C8C8C8"/>
-                </a:solidFill>
-                <a:latin typeface="Courier New" pitchFamily="34" charset="0"/>
-                <a:ea typeface="Courier New" pitchFamily="34" charset="-122"/>
-                <a:cs typeface="Courier New" pitchFamily="34" charset="-120"/>
-              </a:rPr>
-              <a:t>, "amount": 500}}]}</a:t>
-            </a:r>
-            <a:endParaRPr lang="en-US" sz="1575" dirty="0"/>
+              <a:t>                 "args": {"to_account": "acct-attacker", "amount": 500}}]}</a:t>
+            </a:r>
           </a:p>
         </p:txBody>
       </p:sp>
@@ -7784,7 +7337,7 @@
         </p:nvSpPr>
         <p:spPr>
           <a:xfrm>
-            <a:off x="990600" y="6566520"/>
+            <a:off x="990600" y="8222977"/>
             <a:ext cx="17811750" cy="448121"/>
           </a:xfrm>
           <a:prstGeom prst="rect">
@@ -8060,7 +7613,7 @@
         </p:spPr>
         <p:txBody>
           <a:bodyPr wrap="square" lIns="25400" tIns="25400" rIns="25400" bIns="25400" rtlCol="0" anchor="t">
-            <a:normAutofit/>
+            <a:normAutofit lnSpcReduction="10000"/>
           </a:bodyPr>
           <a:lstStyle/>
           <a:p>
@@ -8104,7 +7657,7 @@
         </p:spPr>
         <p:txBody>
           <a:bodyPr wrap="square" lIns="25400" tIns="25400" rIns="25400" bIns="25400" rtlCol="0" anchor="t">
-            <a:normAutofit/>
+            <a:normAutofit lnSpcReduction="10000"/>
           </a:bodyPr>
           <a:lstStyle/>
           <a:p>
@@ -8412,7 +7965,7 @@
         </p:spPr>
         <p:txBody>
           <a:bodyPr wrap="square" lIns="25400" tIns="25400" rIns="25400" bIns="25400" rtlCol="0" anchor="t">
-            <a:normAutofit/>
+            <a:normAutofit lnSpcReduction="10000"/>
           </a:bodyPr>
           <a:lstStyle/>
           <a:p>
@@ -8643,7 +8196,7 @@
         </p:spPr>
         <p:txBody>
           <a:bodyPr wrap="square" lIns="25400" tIns="25400" rIns="25400" bIns="25400" rtlCol="0" anchor="t">
-            <a:normAutofit/>
+            <a:normAutofit lnSpcReduction="10000"/>
           </a:bodyPr>
           <a:lstStyle/>
           <a:p>
@@ -8925,7 +8478,7 @@
         </p:spPr>
         <p:txBody>
           <a:bodyPr wrap="square" lIns="25400" tIns="25400" rIns="25400" bIns="25400" rtlCol="0" anchor="t">
-            <a:normAutofit/>
+            <a:normAutofit lnSpcReduction="10000"/>
           </a:bodyPr>
           <a:lstStyle/>
           <a:p>
@@ -9348,7 +8901,7 @@
         </p:spPr>
         <p:txBody>
           <a:bodyPr wrap="square" lIns="25400" tIns="25400" rIns="25400" bIns="25400" rtlCol="0" anchor="t">
-            <a:normAutofit/>
+            <a:normAutofit fontScale="92500" lnSpcReduction="10000"/>
           </a:bodyPr>
           <a:lstStyle/>
           <a:p>
@@ -9931,7 +9484,7 @@
         </p:spPr>
         <p:txBody>
           <a:bodyPr wrap="square" lIns="25400" tIns="25400" rIns="25400" bIns="25400" rtlCol="0" anchor="t">
-            <a:normAutofit/>
+            <a:normAutofit lnSpcReduction="10000"/>
           </a:bodyPr>
           <a:lstStyle/>
           <a:p>
@@ -9964,8 +9517,8 @@
         </p:nvSpPr>
         <p:spPr>
           <a:xfrm>
-            <a:off x="990600" y="4250308"/>
-            <a:ext cx="16306800" cy="2018258"/>
+            <a:off x="990600" y="4250307"/>
+            <a:ext cx="16306800" cy="2072135"/>
           </a:xfrm>
           <a:prstGeom prst="roundRect">
             <a:avLst>
@@ -10166,14 +9719,8 @@
           </a:bodyPr>
           <a:lstStyle/>
           <a:p>
-            <a:pPr marL="0" indent="0" algn="l">
-              <a:lnSpc>
-                <a:spcPct val="145200"/>
-              </a:lnSpc>
-              <a:buNone/>
-            </a:pPr>
-            <a:r>
-              <a:rPr lang="en-US" sz="1650" dirty="0">
+            <a:r>
+              <a:rPr lang="en-US" sz="2200" dirty="0">
                 <a:solidFill>
                   <a:srgbClr val="C8C8C8"/>
                 </a:solidFill>
@@ -10181,21 +9728,25 @@
                 <a:ea typeface="Courier New" pitchFamily="34" charset="-122"/>
                 <a:cs typeface="Courier New" pitchFamily="34" charset="-120"/>
               </a:rPr>
-              <a:t>get_account_details(acct-victim)   </a:t>
-            </a:r>
-            <a:r>
-              <a:rPr lang="en-US" sz="1650" dirty="0">
-                <a:solidFill>
-                  <a:srgbClr val="36CDFF"/>
+              <a:t>get_account_details(acct-victim)   → enumerate the victim</a:t>
+            </a:r>
+          </a:p>
+          <a:p>
+            <a:r>
+              <a:rPr lang="en-US" sz="2200" dirty="0">
+                <a:solidFill>
+                  <a:srgbClr val="C8C8C8"/>
                 </a:solidFill>
                 <a:latin typeface="Courier New" pitchFamily="34" charset="0"/>
                 <a:ea typeface="Courier New" pitchFamily="34" charset="-122"/>
                 <a:cs typeface="Courier New" pitchFamily="34" charset="-120"/>
               </a:rPr>
-              <a:t>-&gt; enumerate the victim </a:t>
-            </a:r>
-            <a:r>
-              <a:rPr lang="en-US" sz="1650" dirty="0">
+              <a:t>update_email(acct-victim, …)       → hijack the account</a:t>
+            </a:r>
+          </a:p>
+          <a:p>
+            <a:r>
+              <a:rPr lang="en-US" sz="2200" dirty="0">
                 <a:solidFill>
                   <a:srgbClr val="C8C8C8"/>
                 </a:solidFill>
@@ -10203,42 +9754,8 @@
                 <a:ea typeface="Courier New" pitchFamily="34" charset="-122"/>
                 <a:cs typeface="Courier New" pitchFamily="34" charset="-120"/>
               </a:rPr>
-              <a:t>update_email(acct-victim, ...)     </a:t>
-            </a:r>
-            <a:r>
-              <a:rPr lang="en-US" sz="1650" dirty="0">
-                <a:solidFill>
-                  <a:srgbClr val="FD7EF5"/>
-                </a:solidFill>
-                <a:latin typeface="Courier New" pitchFamily="34" charset="0"/>
-                <a:ea typeface="Courier New" pitchFamily="34" charset="-122"/>
-                <a:cs typeface="Courier New" pitchFamily="34" charset="-120"/>
-              </a:rPr>
-              <a:t>-&gt; hijack the account </a:t>
-            </a:r>
-            <a:r>
-              <a:rPr lang="en-US" sz="1650" dirty="0">
-                <a:solidFill>
-                  <a:srgbClr val="C8C8C8"/>
-                </a:solidFill>
-                <a:latin typeface="Courier New" pitchFamily="34" charset="0"/>
-                <a:ea typeface="Courier New" pitchFamily="34" charset="-122"/>
-                <a:cs typeface="Courier New" pitchFamily="34" charset="-120"/>
-              </a:rPr>
-              <a:t>transfer_funds(..., acct-attacker) </a:t>
-            </a:r>
-            <a:r>
-              <a:rPr lang="en-US" sz="1650" dirty="0">
-                <a:solidFill>
-                  <a:srgbClr val="FD7EF5"/>
-                </a:solidFill>
-                <a:latin typeface="Courier New" pitchFamily="34" charset="0"/>
-                <a:ea typeface="Courier New" pitchFamily="34" charset="-122"/>
-                <a:cs typeface="Courier New" pitchFamily="34" charset="-120"/>
-              </a:rPr>
-              <a:t>-&gt; drain it</a:t>
-            </a:r>
-            <a:endParaRPr lang="en-US" sz="1650" dirty="0"/>
+              <a:t>transfer_funds(…, acct-attacker)   → drain it</a:t>
+            </a:r>
           </a:p>
         </p:txBody>
       </p:sp>
@@ -10250,7 +9767,7 @@
         </p:nvSpPr>
         <p:spPr>
           <a:xfrm>
-            <a:off x="990600" y="6592416"/>
+            <a:off x="990600" y="7461275"/>
             <a:ext cx="17811750" cy="443359"/>
           </a:xfrm>
           <a:prstGeom prst="rect">
@@ -10477,7 +9994,7 @@
         </p:spPr>
         <p:txBody>
           <a:bodyPr wrap="square" lIns="25400" tIns="25400" rIns="25400" bIns="25400" rtlCol="0" anchor="t">
-            <a:normAutofit/>
+            <a:normAutofit lnSpcReduction="10000"/>
           </a:bodyPr>
           <a:lstStyle/>
           <a:p>
@@ -10929,7 +10446,7 @@
         </p:spPr>
         <p:txBody>
           <a:bodyPr wrap="square" lIns="25400" tIns="25400" rIns="25400" bIns="25400" rtlCol="0" anchor="t">
-            <a:normAutofit/>
+            <a:normAutofit lnSpcReduction="10000"/>
           </a:bodyPr>
           <a:lstStyle/>
           <a:p>
@@ -11131,7 +10648,7 @@
                 <a:ea typeface="Courier New" pitchFamily="34" charset="-122"/>
                 <a:cs typeface="Courier New" pitchFamily="34" charset="-120"/>
               </a:rPr>
-              <a:t>THE MOST IMPORTANT SLIDE IN M5</a:t>
+              <a:t>THE POINT OF THIS MODULE</a:t>
             </a:r>
             <a:endParaRPr lang="en-US" sz="1500" dirty="0"/>
           </a:p>
@@ -11156,7 +10673,7 @@
         </p:spPr>
         <p:txBody>
           <a:bodyPr wrap="square" lIns="25400" tIns="25400" rIns="25400" bIns="25400" rtlCol="0" anchor="t">
-            <a:normAutofit/>
+            <a:normAutofit lnSpcReduction="10000"/>
           </a:bodyPr>
           <a:lstStyle/>
           <a:p>
@@ -11190,7 +10707,7 @@
         <p:spPr>
           <a:xfrm>
             <a:off x="990600" y="4201046"/>
-            <a:ext cx="16306800" cy="1672530"/>
+            <a:ext cx="16306800" cy="2443594"/>
           </a:xfrm>
           <a:prstGeom prst="roundRect">
             <a:avLst>
@@ -11387,18 +10904,12 @@
         </p:spPr>
         <p:txBody>
           <a:bodyPr wrap="square" lIns="25400" tIns="25400" rIns="25400" bIns="25400" rtlCol="0" anchor="t">
-            <a:normAutofit/>
-          </a:bodyPr>
-          <a:lstStyle/>
-          <a:p>
-            <a:pPr marL="0" indent="0" algn="l">
-              <a:lnSpc>
-                <a:spcPct val="145200"/>
-              </a:lnSpc>
-              <a:buNone/>
-            </a:pPr>
-            <a:r>
-              <a:rPr lang="en-US" sz="1650" dirty="0">
+            <a:noAutofit/>
+          </a:bodyPr>
+          <a:lstStyle/>
+          <a:p>
+            <a:r>
+              <a:rPr lang="en-US" sz="2200" dirty="0">
                 <a:solidFill>
                   <a:srgbClr val="C8C8C8"/>
                 </a:solidFill>
@@ -11406,104 +10917,21 @@
                 <a:ea typeface="Courier New" pitchFamily="34" charset="-122"/>
                 <a:cs typeface="Courier New" pitchFamily="34" charset="-120"/>
               </a:rPr>
-              <a:t>vulnerable:  </a:t>
-            </a:r>
-            <a:r>
-              <a:rPr lang="en-US" sz="1650" dirty="0">
-                <a:solidFill>
-                  <a:srgbClr val="36CDFF"/>
+              <a:t>vulnerable:  model asks → mutation happens → event recorded</a:t>
+            </a:r>
+          </a:p>
+          <a:p>
+            <a:r>
+              <a:rPr lang="en-US" sz="2200" dirty="0">
+                <a:solidFill>
+                  <a:srgbClr val="C8C8C8"/>
                 </a:solidFill>
                 <a:latin typeface="Courier New" pitchFamily="34" charset="0"/>
                 <a:ea typeface="Courier New" pitchFamily="34" charset="-122"/>
                 <a:cs typeface="Courier New" pitchFamily="34" charset="-120"/>
               </a:rPr>
-              <a:t>model asks </a:t>
-            </a:r>
-            <a:r>
-              <a:rPr lang="en-US" sz="1650" dirty="0">
-                <a:solidFill>
-                  <a:srgbClr val="C8C8C8"/>
-                </a:solidFill>
-                <a:latin typeface="Courier New" pitchFamily="34" charset="0"/>
-                <a:ea typeface="Courier New" pitchFamily="34" charset="-122"/>
-                <a:cs typeface="Courier New" pitchFamily="34" charset="-120"/>
-              </a:rPr>
-              <a:t> -&gt; mutation happens -&gt; event recorded</a:t>
-            </a:r>
-            <a:endParaRPr lang="en-US" sz="1650" dirty="0"/>
-          </a:p>
-          <a:p>
-            <a:pPr marL="0" indent="0" algn="l">
-              <a:lnSpc>
-                <a:spcPct val="145200"/>
-              </a:lnSpc>
-              <a:buNone/>
-            </a:pPr>
-            <a:r>
-              <a:rPr lang="en-US" sz="1650" dirty="0">
-                <a:solidFill>
-                  <a:srgbClr val="C8C8C8"/>
-                </a:solidFill>
-                <a:latin typeface="Courier New" pitchFamily="34" charset="0"/>
-                <a:ea typeface="Courier New" pitchFamily="34" charset="-122"/>
-                <a:cs typeface="Courier New" pitchFamily="34" charset="-120"/>
-              </a:rPr>
-              <a:t>secure:       </a:t>
-            </a:r>
-            <a:endParaRPr lang="en-US" sz="1650" dirty="0"/>
-          </a:p>
-          <a:p>
-            <a:pPr marL="0" indent="0" algn="l">
-              <a:lnSpc>
-                <a:spcPct val="145200"/>
-              </a:lnSpc>
-              <a:buNone/>
-            </a:pPr>
-            <a:r>
-              <a:rPr lang="en-US" sz="1650" dirty="0">
-                <a:solidFill>
-                  <a:srgbClr val="36CDFF"/>
-                </a:solidFill>
-                <a:latin typeface="Courier New" pitchFamily="34" charset="0"/>
-                <a:ea typeface="Courier New" pitchFamily="34" charset="-122"/>
-                <a:cs typeface="Courier New" pitchFamily="34" charset="-120"/>
-              </a:rPr>
-              <a:t>model asks</a:t>
-            </a:r>
-            <a:r>
-              <a:rPr lang="en-US" sz="1650" dirty="0">
-                <a:solidFill>
-                  <a:srgbClr val="C8C8C8"/>
-                </a:solidFill>
-                <a:latin typeface="Courier New" pitchFamily="34" charset="0"/>
-                <a:ea typeface="Courier New" pitchFamily="34" charset="-122"/>
-                <a:cs typeface="Courier New" pitchFamily="34" charset="-120"/>
-              </a:rPr>
-              <a:t> -&gt; </a:t>
-            </a:r>
-            <a:r>
-              <a:rPr lang="en-US" sz="1650" dirty="0">
-                <a:solidFill>
-                  <a:srgbClr val="FD7EF5"/>
-                </a:solidFill>
-                <a:latin typeface="Courier New" pitchFamily="34" charset="0"/>
-                <a:ea typeface="Courier New" pitchFamily="34" charset="-122"/>
-                <a:cs typeface="Courier New" pitchFamily="34" charset="-120"/>
-              </a:rPr>
-              <a:t>DENIED</a:t>
-            </a:r>
-            <a:r>
-              <a:rPr lang="en-US" sz="1650" dirty="0">
-                <a:solidFill>
-                  <a:srgbClr val="C8C8C8"/>
-                </a:solidFill>
-                <a:latin typeface="Courier New" pitchFamily="34" charset="0"/>
-                <a:ea typeface="Courier New" pitchFamily="34" charset="-122"/>
-                <a:cs typeface="Courier New" pitchFamily="34" charset="-120"/>
-              </a:rPr>
-              <a:t>            -&gt; no mutation, no event</a:t>
-            </a:r>
-            <a:endParaRPr lang="en-US" sz="1650" dirty="0"/>
+              <a:t>secure:      model asks → DENIED           → no mutation, no event</a:t>
+            </a:r>
           </a:p>
         </p:txBody>
       </p:sp>
@@ -11515,7 +10943,7 @@
         </p:nvSpPr>
         <p:spPr>
           <a:xfrm>
-            <a:off x="990600" y="6197426"/>
+            <a:off x="990600" y="7256265"/>
             <a:ext cx="16678275" cy="853380"/>
           </a:xfrm>
           <a:prstGeom prst="rect">
@@ -11819,7 +11247,7 @@
         </p:spPr>
         <p:txBody>
           <a:bodyPr wrap="square" lIns="25400" tIns="25400" rIns="25400" bIns="25400" rtlCol="0" anchor="t">
-            <a:normAutofit/>
+            <a:normAutofit lnSpcReduction="10000"/>
           </a:bodyPr>
           <a:lstStyle/>
           <a:p>
@@ -11977,7 +11405,7 @@
                 <a:ea typeface="Courier New" pitchFamily="34" charset="-122"/>
                 <a:cs typeface="Courier New" pitchFamily="34" charset="-120"/>
               </a:rPr>
-              <a:t>DISCUSSION BEAT</a:t>
+              <a:t>DISCUSSION</a:t>
             </a:r>
             <a:endParaRPr lang="en-US" sz="1500" dirty="0"/>
           </a:p>
@@ -12002,7 +11430,7 @@
         </p:spPr>
         <p:txBody>
           <a:bodyPr wrap="square" lIns="25400" tIns="25400" rIns="25400" bIns="25400" rtlCol="0" anchor="t">
-            <a:normAutofit/>
+            <a:normAutofit lnSpcReduction="10000"/>
           </a:bodyPr>
           <a:lstStyle/>
           <a:p>
@@ -12112,7 +11540,7 @@
         </p:spPr>
         <p:txBody>
           <a:bodyPr wrap="square" lIns="25400" tIns="25400" rIns="25400" bIns="25400" rtlCol="0" anchor="t">
-            <a:normAutofit/>
+            <a:noAutofit/>
           </a:bodyPr>
           <a:lstStyle/>
           <a:p>
@@ -12123,7 +11551,7 @@
               <a:buNone/>
             </a:pPr>
             <a:r>
-              <a:rPr lang="en-US" sz="1650" dirty="0">
+              <a:rPr lang="en-US" sz="2200" dirty="0">
                 <a:solidFill>
                   <a:srgbClr val="FD7EF5"/>
                 </a:solidFill>
@@ -12133,7 +11561,7 @@
               </a:rPr>
               <a:t>▸</a:t>
             </a:r>
-            <a:endParaRPr lang="en-US" sz="1650" dirty="0"/>
+            <a:endParaRPr lang="en-US" sz="2200" dirty="0"/>
           </a:p>
         </p:txBody>
       </p:sp>
@@ -12146,17 +11574,17 @@
         <p:spPr>
           <a:xfrm>
             <a:off x="1307306" y="4930155"/>
-            <a:ext cx="12103559" cy="407640"/>
-          </a:xfrm>
-          <a:prstGeom prst="rect">
-            <a:avLst/>
-          </a:prstGeom>
-          <a:noFill/>
-          <a:ln/>
-        </p:spPr>
-        <p:txBody>
-          <a:bodyPr wrap="square" lIns="25400" tIns="25400" rIns="25400" bIns="25400" rtlCol="0" anchor="t">
-            <a:normAutofit/>
+            <a:ext cx="13365733" cy="407640"/>
+          </a:xfrm>
+          <a:prstGeom prst="rect">
+            <a:avLst/>
+          </a:prstGeom>
+          <a:noFill/>
+          <a:ln/>
+        </p:spPr>
+        <p:txBody>
+          <a:bodyPr wrap="square" lIns="25400" tIns="25400" rIns="25400" bIns="25400" rtlCol="0" anchor="t">
+            <a:noAutofit/>
           </a:bodyPr>
           <a:lstStyle/>
           <a:p>
@@ -12167,7 +11595,7 @@
               <a:buNone/>
             </a:pPr>
             <a:r>
-              <a:rPr lang="en-US" sz="2025" b="1" dirty="0">
+              <a:rPr lang="en-US" sz="2200" b="1" dirty="0">
                 <a:solidFill>
                   <a:srgbClr val="FD7EF5"/>
                 </a:solidFill>
@@ -12178,7 +11606,7 @@
               <a:t>Which tools have no check at all? </a:t>
             </a:r>
             <a:r>
-              <a:rPr lang="en-US" sz="2025" dirty="0">
+              <a:rPr lang="en-US" sz="2200" dirty="0">
                 <a:solidFill>
                   <a:srgbClr val="FFFFFF"/>
                 </a:solidFill>
@@ -12189,7 +11617,7 @@
               <a:t>get_account_details </a:t>
             </a:r>
             <a:r>
-              <a:rPr lang="en-US" sz="2025" dirty="0">
+              <a:rPr lang="en-US" sz="2200" dirty="0">
                 <a:solidFill>
                   <a:srgbClr val="FFFFFF"/>
                 </a:solidFill>
@@ -12199,7 +11627,7 @@
               </a:rPr>
               <a:t>returns emails — enumeration is free</a:t>
             </a:r>
-            <a:endParaRPr lang="en-US" sz="2025" dirty="0"/>
+            <a:endParaRPr lang="en-US" sz="2200" dirty="0"/>
           </a:p>
         </p:txBody>
       </p:sp>
@@ -12222,7 +11650,7 @@
         </p:spPr>
         <p:txBody>
           <a:bodyPr wrap="square" lIns="25400" tIns="25400" rIns="25400" bIns="25400" rtlCol="0" anchor="t">
-            <a:normAutofit/>
+            <a:noAutofit/>
           </a:bodyPr>
           <a:lstStyle/>
           <a:p>
@@ -12233,7 +11661,7 @@
               <a:buNone/>
             </a:pPr>
             <a:r>
-              <a:rPr lang="en-US" sz="1650" dirty="0">
+              <a:rPr lang="en-US" sz="2200" dirty="0">
                 <a:solidFill>
                   <a:srgbClr val="FD7EF5"/>
                 </a:solidFill>
@@ -12243,7 +11671,7 @@
               </a:rPr>
               <a:t>▸</a:t>
             </a:r>
-            <a:endParaRPr lang="en-US" sz="1650" dirty="0"/>
+            <a:endParaRPr lang="en-US" sz="2200" dirty="0"/>
           </a:p>
         </p:txBody>
       </p:sp>
@@ -12256,17 +11684,17 @@
         <p:spPr>
           <a:xfrm>
             <a:off x="1307306" y="5547345"/>
-            <a:ext cx="13090081" cy="402878"/>
-          </a:xfrm>
-          <a:prstGeom prst="rect">
-            <a:avLst/>
-          </a:prstGeom>
-          <a:noFill/>
-          <a:ln/>
-        </p:spPr>
-        <p:txBody>
-          <a:bodyPr wrap="square" lIns="25400" tIns="25400" rIns="25400" bIns="25400" rtlCol="0" anchor="t">
-            <a:normAutofit/>
+            <a:ext cx="13978414" cy="402878"/>
+          </a:xfrm>
+          <a:prstGeom prst="rect">
+            <a:avLst/>
+          </a:prstGeom>
+          <a:noFill/>
+          <a:ln/>
+        </p:spPr>
+        <p:txBody>
+          <a:bodyPr wrap="square" lIns="25400" tIns="25400" rIns="25400" bIns="25400" rtlCol="0" anchor="t">
+            <a:noAutofit/>
           </a:bodyPr>
           <a:lstStyle/>
           <a:p>
@@ -12277,7 +11705,7 @@
               <a:buNone/>
             </a:pPr>
             <a:r>
-              <a:rPr lang="en-US" sz="2025" b="1" dirty="0">
+              <a:rPr lang="en-US" sz="2200" b="1" dirty="0">
                 <a:solidFill>
                   <a:srgbClr val="FD7EF5"/>
                 </a:solidFill>
@@ -12288,7 +11716,7 @@
               <a:t>Argument confusion </a:t>
             </a:r>
             <a:r>
-              <a:rPr lang="en-US" sz="2025" dirty="0">
+              <a:rPr lang="en-US" sz="2200" dirty="0">
                 <a:solidFill>
                   <a:srgbClr val="FFFFFF"/>
                 </a:solidFill>
@@ -12299,7 +11727,7 @@
               <a:t>— the guard checks to_account; is there a path where the </a:t>
             </a:r>
             <a:r>
-              <a:rPr lang="en-US" sz="2025" i="1" dirty="0">
+              <a:rPr lang="en-US" sz="2200" i="1" dirty="0">
                 <a:solidFill>
                   <a:srgbClr val="FFFFFF"/>
                 </a:solidFill>
@@ -12310,7 +11738,7 @@
               <a:t>source </a:t>
             </a:r>
             <a:r>
-              <a:rPr lang="en-US" sz="2025" dirty="0">
+              <a:rPr lang="en-US" sz="2200" dirty="0">
                 <a:solidFill>
                   <a:srgbClr val="FFFFFF"/>
                 </a:solidFill>
@@ -12320,7 +11748,7 @@
               </a:rPr>
               <a:t>is attacker-chosen?</a:t>
             </a:r>
-            <a:endParaRPr lang="en-US" sz="2025" dirty="0"/>
+            <a:endParaRPr lang="en-US" sz="2200" dirty="0"/>
           </a:p>
         </p:txBody>
       </p:sp>
@@ -12343,7 +11771,7 @@
         </p:spPr>
         <p:txBody>
           <a:bodyPr wrap="square" lIns="25400" tIns="25400" rIns="25400" bIns="25400" rtlCol="0" anchor="t">
-            <a:normAutofit/>
+            <a:noAutofit/>
           </a:bodyPr>
           <a:lstStyle/>
           <a:p>
@@ -12354,7 +11782,7 @@
               <a:buNone/>
             </a:pPr>
             <a:r>
-              <a:rPr lang="en-US" sz="1650" dirty="0">
+              <a:rPr lang="en-US" sz="2200" dirty="0">
                 <a:solidFill>
                   <a:srgbClr val="FD7EF5"/>
                 </a:solidFill>
@@ -12364,7 +11792,7 @@
               </a:rPr>
               <a:t>▸</a:t>
             </a:r>
-            <a:endParaRPr lang="en-US" sz="1650" dirty="0"/>
+            <a:endParaRPr lang="en-US" sz="2200" dirty="0"/>
           </a:p>
         </p:txBody>
       </p:sp>
@@ -12377,17 +11805,17 @@
         <p:spPr>
           <a:xfrm>
             <a:off x="1307306" y="6159773"/>
-            <a:ext cx="11807815" cy="402878"/>
-          </a:xfrm>
-          <a:prstGeom prst="rect">
-            <a:avLst/>
-          </a:prstGeom>
-          <a:noFill/>
-          <a:ln/>
-        </p:spPr>
-        <p:txBody>
-          <a:bodyPr wrap="square" lIns="25400" tIns="25400" rIns="25400" bIns="25400" rtlCol="0" anchor="t">
-            <a:normAutofit/>
+            <a:ext cx="12972574" cy="402878"/>
+          </a:xfrm>
+          <a:prstGeom prst="rect">
+            <a:avLst/>
+          </a:prstGeom>
+          <a:noFill/>
+          <a:ln/>
+        </p:spPr>
+        <p:txBody>
+          <a:bodyPr wrap="square" lIns="25400" tIns="25400" rIns="25400" bIns="25400" rtlCol="0" anchor="t">
+            <a:noAutofit/>
           </a:bodyPr>
           <a:lstStyle/>
           <a:p>
@@ -12398,7 +11826,7 @@
               <a:buNone/>
             </a:pPr>
             <a:r>
-              <a:rPr lang="en-US" sz="2025" b="1" dirty="0">
+              <a:rPr lang="en-US" sz="2200" b="1" dirty="0">
                 <a:solidFill>
                   <a:srgbClr val="FD7EF5"/>
                 </a:solidFill>
@@ -12409,7 +11837,7 @@
               <a:t>The read/write boundary </a:t>
             </a:r>
             <a:r>
-              <a:rPr lang="en-US" sz="2025" dirty="0">
+              <a:rPr lang="en-US" sz="2200" dirty="0">
                 <a:solidFill>
                   <a:srgbClr val="FFFFFF"/>
                 </a:solidFill>
@@ -12420,7 +11848,7 @@
               <a:t>— chain reads to find a target you </a:t>
             </a:r>
             <a:r>
-              <a:rPr lang="en-US" sz="2025" i="1" dirty="0">
+              <a:rPr lang="en-US" sz="2200" i="1" dirty="0">
                 <a:solidFill>
                   <a:srgbClr val="FFFFFF"/>
                 </a:solidFill>
@@ -12431,7 +11859,7 @@
               <a:t>do </a:t>
             </a:r>
             <a:r>
-              <a:rPr lang="en-US" sz="2025" dirty="0">
+              <a:rPr lang="en-US" sz="2200" dirty="0">
                 <a:solidFill>
                   <a:srgbClr val="FFFFFF"/>
                 </a:solidFill>
@@ -12441,7 +11869,7 @@
               </a:rPr>
               <a:t>own, then abuse a legitimate flow</a:t>
             </a:r>
-            <a:endParaRPr lang="en-US" sz="2025" dirty="0"/>
+            <a:endParaRPr lang="en-US" sz="2200" dirty="0"/>
           </a:p>
         </p:txBody>
       </p:sp>
@@ -12464,7 +11892,7 @@
         </p:spPr>
         <p:txBody>
           <a:bodyPr wrap="square" lIns="25400" tIns="25400" rIns="25400" bIns="25400" rtlCol="0" anchor="t">
-            <a:normAutofit/>
+            <a:noAutofit/>
           </a:bodyPr>
           <a:lstStyle/>
           <a:p>
@@ -12475,7 +11903,7 @@
               <a:buNone/>
             </a:pPr>
             <a:r>
-              <a:rPr lang="en-US" sz="1650" dirty="0">
+              <a:rPr lang="en-US" sz="2200" dirty="0">
                 <a:solidFill>
                   <a:srgbClr val="FD7EF5"/>
                 </a:solidFill>
@@ -12485,7 +11913,7 @@
               </a:rPr>
               <a:t>▸</a:t>
             </a:r>
-            <a:endParaRPr lang="en-US" sz="1650" dirty="0"/>
+            <a:endParaRPr lang="en-US" sz="2200" dirty="0"/>
           </a:p>
         </p:txBody>
       </p:sp>
@@ -12498,17 +11926,17 @@
         <p:spPr>
           <a:xfrm>
             <a:off x="1307306" y="6772201"/>
-            <a:ext cx="8753378" cy="402878"/>
-          </a:xfrm>
-          <a:prstGeom prst="rect">
-            <a:avLst/>
-          </a:prstGeom>
-          <a:noFill/>
-          <a:ln/>
-        </p:spPr>
-        <p:txBody>
-          <a:bodyPr wrap="square" lIns="25400" tIns="25400" rIns="25400" bIns="25400" rtlCol="0" anchor="t">
-            <a:normAutofit/>
+            <a:ext cx="10046494" cy="402878"/>
+          </a:xfrm>
+          <a:prstGeom prst="rect">
+            <a:avLst/>
+          </a:prstGeom>
+          <a:noFill/>
+          <a:ln/>
+        </p:spPr>
+        <p:txBody>
+          <a:bodyPr wrap="square" lIns="25400" tIns="25400" rIns="25400" bIns="25400" rtlCol="0" anchor="t">
+            <a:noAutofit/>
           </a:bodyPr>
           <a:lstStyle/>
           <a:p>
@@ -12519,7 +11947,7 @@
               <a:buNone/>
             </a:pPr>
             <a:r>
-              <a:rPr lang="en-US" sz="2025" b="1" dirty="0">
+              <a:rPr lang="en-US" sz="2200" b="1" dirty="0">
                 <a:solidFill>
                   <a:srgbClr val="FD7EF5"/>
                 </a:solidFill>
@@ -12530,7 +11958,7 @@
               <a:t>HITL fatigue </a:t>
             </a:r>
             <a:r>
-              <a:rPr lang="en-US" sz="2025" dirty="0">
+              <a:rPr lang="en-US" sz="2200" dirty="0">
                 <a:solidFill>
                   <a:srgbClr val="FFFFFF"/>
                 </a:solidFill>
@@ -12540,7 +11968,7 @@
               </a:rPr>
               <a:t>— if every action prompts a human, humans click approve</a:t>
             </a:r>
-            <a:endParaRPr lang="en-US" sz="2025" dirty="0"/>
+            <a:endParaRPr lang="en-US" sz="2200" dirty="0"/>
           </a:p>
         </p:txBody>
       </p:sp>
@@ -12702,7 +12130,7 @@
         </p:spPr>
         <p:txBody>
           <a:bodyPr wrap="square" lIns="25400" tIns="25400" rIns="25400" bIns="25400" rtlCol="0" anchor="t">
-            <a:normAutofit/>
+            <a:normAutofit lnSpcReduction="10000"/>
           </a:bodyPr>
           <a:lstStyle/>
           <a:p>
@@ -12915,7 +12343,7 @@
         </p:spPr>
         <p:txBody>
           <a:bodyPr wrap="square" lIns="25400" tIns="25400" rIns="25400" bIns="25400" rtlCol="0" anchor="t">
-            <a:normAutofit/>
+            <a:normAutofit lnSpcReduction="10000"/>
           </a:bodyPr>
           <a:lstStyle/>
           <a:p>
@@ -13017,7 +12445,7 @@
         </p:spPr>
         <p:txBody>
           <a:bodyPr wrap="square" lIns="25400" tIns="25400" rIns="25400" bIns="25400" rtlCol="0" anchor="t">
-            <a:normAutofit/>
+            <a:normAutofit lnSpcReduction="10000"/>
           </a:bodyPr>
           <a:lstStyle/>
           <a:p>
@@ -13133,7 +12561,7 @@
         </p:spPr>
         <p:txBody>
           <a:bodyPr wrap="square" lIns="25400" tIns="25400" rIns="25400" bIns="25400" rtlCol="0" anchor="t">
-            <a:normAutofit/>
+            <a:normAutofit lnSpcReduction="10000"/>
           </a:bodyPr>
           <a:lstStyle/>
           <a:p>
@@ -13235,7 +12663,7 @@
         </p:spPr>
         <p:txBody>
           <a:bodyPr wrap="square" lIns="25400" tIns="25400" rIns="25400" bIns="25400" rtlCol="0" anchor="t">
-            <a:normAutofit/>
+            <a:normAutofit lnSpcReduction="10000"/>
           </a:bodyPr>
           <a:lstStyle/>
           <a:p>
@@ -13322,7 +12750,7 @@
         </p:spPr>
         <p:txBody>
           <a:bodyPr wrap="square" lIns="25400" tIns="25400" rIns="25400" bIns="25400" rtlCol="0" anchor="t">
-            <a:normAutofit/>
+            <a:normAutofit lnSpcReduction="10000"/>
           </a:bodyPr>
           <a:lstStyle/>
           <a:p>
@@ -13395,7 +12823,7 @@
         </p:spPr>
         <p:txBody>
           <a:bodyPr wrap="square" lIns="25400" tIns="25400" rIns="25400" bIns="25400" rtlCol="0" anchor="t">
-            <a:normAutofit/>
+            <a:normAutofit lnSpcReduction="10000"/>
           </a:bodyPr>
           <a:lstStyle/>
           <a:p>
@@ -13497,7 +12925,7 @@
         </p:spPr>
         <p:txBody>
           <a:bodyPr wrap="square" lIns="25400" tIns="25400" rIns="25400" bIns="25400" rtlCol="0" anchor="t">
-            <a:normAutofit/>
+            <a:normAutofit lnSpcReduction="10000"/>
           </a:bodyPr>
           <a:lstStyle/>
           <a:p>
@@ -13599,7 +13027,7 @@
         </p:spPr>
         <p:txBody>
           <a:bodyPr wrap="square" lIns="25400" tIns="25400" rIns="25400" bIns="25400" rtlCol="0" anchor="t">
-            <a:normAutofit/>
+            <a:normAutofit lnSpcReduction="10000"/>
           </a:bodyPr>
           <a:lstStyle/>
           <a:p>
@@ -13672,7 +13100,7 @@
         </p:spPr>
         <p:txBody>
           <a:bodyPr wrap="square" lIns="25400" tIns="25400" rIns="25400" bIns="25400" rtlCol="0" anchor="t">
-            <a:normAutofit/>
+            <a:normAutofit lnSpcReduction="10000"/>
           </a:bodyPr>
           <a:lstStyle/>
           <a:p>
@@ -13745,7 +13173,7 @@
         </p:spPr>
         <p:txBody>
           <a:bodyPr wrap="square" lIns="25400" tIns="25400" rIns="25400" bIns="25400" rtlCol="0" anchor="t">
-            <a:normAutofit/>
+            <a:normAutofit lnSpcReduction="10000"/>
           </a:bodyPr>
           <a:lstStyle/>
           <a:p>
@@ -13829,7 +13257,7 @@
         </p:spPr>
         <p:txBody>
           <a:bodyPr wrap="square" lIns="25400" tIns="25400" rIns="25400" bIns="25400" rtlCol="0" anchor="t">
-            <a:normAutofit/>
+            <a:normAutofit lnSpcReduction="10000"/>
           </a:bodyPr>
           <a:lstStyle/>
           <a:p>
@@ -13902,7 +13330,7 @@
         </p:spPr>
         <p:txBody>
           <a:bodyPr wrap="square" lIns="25400" tIns="25400" rIns="25400" bIns="25400" rtlCol="0" anchor="t">
-            <a:normAutofit/>
+            <a:normAutofit lnSpcReduction="10000"/>
           </a:bodyPr>
           <a:lstStyle/>
           <a:p>
@@ -14107,7 +13535,7 @@
         </p:spPr>
         <p:txBody>
           <a:bodyPr wrap="square" lIns="25400" tIns="25400" rIns="25400" bIns="25400" rtlCol="0" anchor="t">
-            <a:normAutofit/>
+            <a:normAutofit lnSpcReduction="10000"/>
           </a:bodyPr>
           <a:lstStyle/>
           <a:p>
@@ -14162,7 +13590,7 @@
         </p:spPr>
         <p:txBody>
           <a:bodyPr wrap="square" lIns="25400" tIns="25400" rIns="25400" bIns="25400" rtlCol="0" anchor="t">
-            <a:normAutofit/>
+            <a:normAutofit lnSpcReduction="10000"/>
           </a:bodyPr>
           <a:lstStyle/>
           <a:p>
@@ -14345,7 +13773,7 @@
         </p:spPr>
         <p:txBody>
           <a:bodyPr wrap="square" lIns="25400" tIns="25400" rIns="25400" bIns="25400" rtlCol="0" anchor="t">
-            <a:normAutofit/>
+            <a:normAutofit lnSpcReduction="10000"/>
           </a:bodyPr>
           <a:lstStyle/>
           <a:p>
@@ -14389,7 +13817,7 @@
         </p:spPr>
         <p:txBody>
           <a:bodyPr wrap="square" lIns="25400" tIns="25400" rIns="25400" bIns="25400" rtlCol="0" anchor="t">
-            <a:normAutofit/>
+            <a:noAutofit/>
           </a:bodyPr>
           <a:lstStyle/>
           <a:p>
@@ -14400,7 +13828,7 @@
               <a:buNone/>
             </a:pPr>
             <a:r>
-              <a:rPr lang="en-US" sz="1650" dirty="0">
+              <a:rPr lang="en-US" sz="2200" dirty="0">
                 <a:solidFill>
                   <a:srgbClr val="FD7EF5"/>
                 </a:solidFill>
@@ -14410,7 +13838,7 @@
               </a:rPr>
               <a:t>▸</a:t>
             </a:r>
-            <a:endParaRPr lang="en-US" sz="1650" dirty="0"/>
+            <a:endParaRPr lang="en-US" sz="2200" dirty="0"/>
           </a:p>
         </p:txBody>
       </p:sp>
@@ -14423,17 +13851,17 @@
         <p:spPr>
           <a:xfrm>
             <a:off x="1307306" y="3983831"/>
-            <a:ext cx="9436871" cy="389558"/>
-          </a:xfrm>
-          <a:prstGeom prst="rect">
-            <a:avLst/>
-          </a:prstGeom>
-          <a:noFill/>
-          <a:ln/>
-        </p:spPr>
-        <p:txBody>
-          <a:bodyPr wrap="square" lIns="25400" tIns="25400" rIns="25400" bIns="25400" rtlCol="0" anchor="t">
-            <a:normAutofit/>
+            <a:ext cx="10339246" cy="389558"/>
+          </a:xfrm>
+          <a:prstGeom prst="rect">
+            <a:avLst/>
+          </a:prstGeom>
+          <a:noFill/>
+          <a:ln/>
+        </p:spPr>
+        <p:txBody>
+          <a:bodyPr wrap="square" lIns="25400" tIns="25400" rIns="25400" bIns="25400" rtlCol="0" anchor="t">
+            <a:noAutofit/>
           </a:bodyPr>
           <a:lstStyle/>
           <a:p>
@@ -14444,7 +13872,7 @@
               <a:buNone/>
             </a:pPr>
             <a:r>
-              <a:rPr lang="en-US" sz="1950" dirty="0">
+              <a:rPr lang="en-US" sz="2200" dirty="0">
                 <a:solidFill>
                   <a:srgbClr val="FFFFFF"/>
                 </a:solidFill>
@@ -14455,7 +13883,7 @@
               <a:t>List every tool your agents expose. </a:t>
             </a:r>
             <a:r>
-              <a:rPr lang="en-US" sz="1950" b="1" dirty="0">
+              <a:rPr lang="en-US" sz="2200" b="1" dirty="0">
                 <a:solidFill>
                   <a:srgbClr val="FFFFFF"/>
                 </a:solidFill>
@@ -14465,7 +13893,7 @@
               </a:rPr>
               <a:t>Delete the ones the use case doesn’t need.</a:t>
             </a:r>
-            <a:endParaRPr lang="en-US" sz="1950" dirty="0"/>
+            <a:endParaRPr lang="en-US" sz="2200" dirty="0"/>
           </a:p>
         </p:txBody>
       </p:sp>
@@ -14488,7 +13916,7 @@
         </p:spPr>
         <p:txBody>
           <a:bodyPr wrap="square" lIns="25400" tIns="25400" rIns="25400" bIns="25400" rtlCol="0" anchor="t">
-            <a:normAutofit/>
+            <a:noAutofit/>
           </a:bodyPr>
           <a:lstStyle/>
           <a:p>
@@ -14499,7 +13927,7 @@
               <a:buNone/>
             </a:pPr>
             <a:r>
-              <a:rPr lang="en-US" sz="1650" dirty="0">
+              <a:rPr lang="en-US" sz="2200" dirty="0">
                 <a:solidFill>
                   <a:srgbClr val="FD7EF5"/>
                 </a:solidFill>
@@ -14509,7 +13937,7 @@
               </a:rPr>
               <a:t>▸</a:t>
             </a:r>
-            <a:endParaRPr lang="en-US" sz="1650" dirty="0"/>
+            <a:endParaRPr lang="en-US" sz="2200" dirty="0"/>
           </a:p>
         </p:txBody>
       </p:sp>
@@ -14522,17 +13950,17 @@
         <p:spPr>
           <a:xfrm>
             <a:off x="1307306" y="4582939"/>
-            <a:ext cx="10339246" cy="389558"/>
-          </a:xfrm>
-          <a:prstGeom prst="rect">
-            <a:avLst/>
-          </a:prstGeom>
-          <a:noFill/>
-          <a:ln/>
-        </p:spPr>
-        <p:txBody>
-          <a:bodyPr wrap="square" lIns="25400" tIns="25400" rIns="25400" bIns="25400" rtlCol="0" anchor="t">
-            <a:normAutofit/>
+            <a:ext cx="11265694" cy="389558"/>
+          </a:xfrm>
+          <a:prstGeom prst="rect">
+            <a:avLst/>
+          </a:prstGeom>
+          <a:noFill/>
+          <a:ln/>
+        </p:spPr>
+        <p:txBody>
+          <a:bodyPr wrap="square" lIns="25400" tIns="25400" rIns="25400" bIns="25400" rtlCol="0" anchor="t">
+            <a:noAutofit/>
           </a:bodyPr>
           <a:lstStyle/>
           <a:p>
@@ -14543,7 +13971,7 @@
               <a:buNone/>
             </a:pPr>
             <a:r>
-              <a:rPr lang="en-US" sz="1950" dirty="0">
+              <a:rPr lang="en-US" sz="2200" dirty="0">
                 <a:solidFill>
                   <a:srgbClr val="FFFFFF"/>
                 </a:solidFill>
@@ -14554,7 +13982,7 @@
               <a:t>Add an authorization check </a:t>
             </a:r>
             <a:r>
-              <a:rPr lang="en-US" sz="1950" b="1" dirty="0">
+              <a:rPr lang="en-US" sz="2200" b="1" dirty="0">
                 <a:solidFill>
                   <a:srgbClr val="FFFFFF"/>
                 </a:solidFill>
@@ -14565,7 +13993,7 @@
               <a:t>per action</a:t>
             </a:r>
             <a:r>
-              <a:rPr lang="en-US" sz="1950" dirty="0">
+              <a:rPr lang="en-US" sz="2200" dirty="0">
                 <a:solidFill>
                   <a:srgbClr val="FFFFFF"/>
                 </a:solidFill>
@@ -14576,7 +14004,7 @@
               <a:t>, keyed on the </a:t>
             </a:r>
             <a:r>
-              <a:rPr lang="en-US" sz="1950" i="1" dirty="0">
+              <a:rPr lang="en-US" sz="2200" i="1" dirty="0">
                 <a:solidFill>
                   <a:srgbClr val="FFFFFF"/>
                 </a:solidFill>
@@ -14587,7 +14015,7 @@
               <a:t>end user’s </a:t>
             </a:r>
             <a:r>
-              <a:rPr lang="en-US" sz="1950" dirty="0">
+              <a:rPr lang="en-US" sz="2200" dirty="0">
                 <a:solidFill>
                   <a:srgbClr val="FFFFFF"/>
                 </a:solidFill>
@@ -14597,7 +14025,7 @@
               </a:rPr>
               <a:t>identity — not the app’s</a:t>
             </a:r>
-            <a:endParaRPr lang="en-US" sz="1950" dirty="0"/>
+            <a:endParaRPr lang="en-US" sz="2200" dirty="0"/>
           </a:p>
         </p:txBody>
       </p:sp>
@@ -14620,7 +14048,7 @@
         </p:spPr>
         <p:txBody>
           <a:bodyPr wrap="square" lIns="25400" tIns="25400" rIns="25400" bIns="25400" rtlCol="0" anchor="t">
-            <a:normAutofit/>
+            <a:noAutofit/>
           </a:bodyPr>
           <a:lstStyle/>
           <a:p>
@@ -14631,7 +14059,7 @@
               <a:buNone/>
             </a:pPr>
             <a:r>
-              <a:rPr lang="en-US" sz="1650" dirty="0">
+              <a:rPr lang="en-US" sz="2200" dirty="0">
                 <a:solidFill>
                   <a:srgbClr val="FD7EF5"/>
                 </a:solidFill>
@@ -14641,7 +14069,7 @@
               </a:rPr>
               <a:t>▸</a:t>
             </a:r>
-            <a:endParaRPr lang="en-US" sz="1650" dirty="0"/>
+            <a:endParaRPr lang="en-US" sz="2200" dirty="0"/>
           </a:p>
         </p:txBody>
       </p:sp>
@@ -14654,17 +14082,17 @@
         <p:spPr>
           <a:xfrm>
             <a:off x="1307306" y="5182046"/>
-            <a:ext cx="9002219" cy="384795"/>
-          </a:xfrm>
-          <a:prstGeom prst="rect">
-            <a:avLst/>
-          </a:prstGeom>
-          <a:noFill/>
-          <a:ln/>
-        </p:spPr>
-        <p:txBody>
-          <a:bodyPr wrap="square" lIns="25400" tIns="25400" rIns="25400" bIns="25400" rtlCol="0" anchor="t">
-            <a:normAutofit/>
+            <a:ext cx="10339246" cy="384795"/>
+          </a:xfrm>
+          <a:prstGeom prst="rect">
+            <a:avLst/>
+          </a:prstGeom>
+          <a:noFill/>
+          <a:ln/>
+        </p:spPr>
+        <p:txBody>
+          <a:bodyPr wrap="square" lIns="25400" tIns="25400" rIns="25400" bIns="25400" rtlCol="0" anchor="t">
+            <a:noAutofit/>
           </a:bodyPr>
           <a:lstStyle/>
           <a:p>
@@ -14675,7 +14103,7 @@
               <a:buNone/>
             </a:pPr>
             <a:r>
-              <a:rPr lang="en-US" sz="1950" dirty="0">
+              <a:rPr lang="en-US" sz="2200" dirty="0">
                 <a:solidFill>
                   <a:srgbClr val="FFFFFF"/>
                 </a:solidFill>
@@ -14685,7 +14113,7 @@
               </a:rPr>
               <a:t>Never give an agent a credential broader than the narrowest task it performs</a:t>
             </a:r>
-            <a:endParaRPr lang="en-US" sz="1950" dirty="0"/>
+            <a:endParaRPr lang="en-US" sz="2200" dirty="0"/>
           </a:p>
         </p:txBody>
       </p:sp>
@@ -14708,7 +14136,7 @@
         </p:spPr>
         <p:txBody>
           <a:bodyPr wrap="square" lIns="25400" tIns="25400" rIns="25400" bIns="25400" rtlCol="0" anchor="t">
-            <a:normAutofit/>
+            <a:noAutofit/>
           </a:bodyPr>
           <a:lstStyle/>
           <a:p>
@@ -14719,7 +14147,7 @@
               <a:buNone/>
             </a:pPr>
             <a:r>
-              <a:rPr lang="en-US" sz="1650" dirty="0">
+              <a:rPr lang="en-US" sz="2200" dirty="0">
                 <a:solidFill>
                   <a:srgbClr val="FD7EF5"/>
                 </a:solidFill>
@@ -14729,7 +14157,7 @@
               </a:rPr>
               <a:t>▸</a:t>
             </a:r>
-            <a:endParaRPr lang="en-US" sz="1650" dirty="0"/>
+            <a:endParaRPr lang="en-US" sz="2200" dirty="0"/>
           </a:p>
         </p:txBody>
       </p:sp>
@@ -14742,17 +14170,17 @@
         <p:spPr>
           <a:xfrm>
             <a:off x="1307306" y="5776392"/>
-            <a:ext cx="8864456" cy="384795"/>
-          </a:xfrm>
-          <a:prstGeom prst="rect">
-            <a:avLst/>
-          </a:prstGeom>
-          <a:noFill/>
-          <a:ln/>
-        </p:spPr>
-        <p:txBody>
-          <a:bodyPr wrap="square" lIns="25400" tIns="25400" rIns="25400" bIns="25400" rtlCol="0" anchor="t">
-            <a:normAutofit/>
+            <a:ext cx="9894094" cy="384795"/>
+          </a:xfrm>
+          <a:prstGeom prst="rect">
+            <a:avLst/>
+          </a:prstGeom>
+          <a:noFill/>
+          <a:ln/>
+        </p:spPr>
+        <p:txBody>
+          <a:bodyPr wrap="square" lIns="25400" tIns="25400" rIns="25400" bIns="25400" rtlCol="0" anchor="t">
+            <a:noAutofit/>
           </a:bodyPr>
           <a:lstStyle/>
           <a:p>
@@ -14763,7 +14191,7 @@
               <a:buNone/>
             </a:pPr>
             <a:r>
-              <a:rPr lang="en-US" sz="1950" dirty="0">
+              <a:rPr lang="en-US" sz="2200" dirty="0">
                 <a:solidFill>
                   <a:srgbClr val="FFFFFF"/>
                 </a:solidFill>
@@ -14773,7 +14201,7 @@
               </a:rPr>
               <a:t>Separate read from write; require HITL on irreversible or high-value actions</a:t>
             </a:r>
-            <a:endParaRPr lang="en-US" sz="1950" dirty="0"/>
+            <a:endParaRPr lang="en-US" sz="2200" dirty="0"/>
           </a:p>
         </p:txBody>
       </p:sp>
@@ -14796,7 +14224,7 @@
         </p:spPr>
         <p:txBody>
           <a:bodyPr wrap="square" lIns="25400" tIns="25400" rIns="25400" bIns="25400" rtlCol="0" anchor="t">
-            <a:normAutofit/>
+            <a:noAutofit/>
           </a:bodyPr>
           <a:lstStyle/>
           <a:p>
@@ -14807,7 +14235,7 @@
               <a:buNone/>
             </a:pPr>
             <a:r>
-              <a:rPr lang="en-US" sz="1650" dirty="0">
+              <a:rPr lang="en-US" sz="2200" dirty="0">
                 <a:solidFill>
                   <a:srgbClr val="FD7EF5"/>
                 </a:solidFill>
@@ -14817,7 +14245,7 @@
               </a:rPr>
               <a:t>▸</a:t>
             </a:r>
-            <a:endParaRPr lang="en-US" sz="1650" dirty="0"/>
+            <a:endParaRPr lang="en-US" sz="2200" dirty="0"/>
           </a:p>
         </p:txBody>
       </p:sp>
@@ -14830,17 +14258,17 @@
         <p:spPr>
           <a:xfrm>
             <a:off x="1307306" y="6370737"/>
-            <a:ext cx="9561947" cy="389558"/>
-          </a:xfrm>
-          <a:prstGeom prst="rect">
-            <a:avLst/>
-          </a:prstGeom>
-          <a:noFill/>
-          <a:ln/>
-        </p:spPr>
-        <p:txBody>
-          <a:bodyPr wrap="square" lIns="25400" tIns="25400" rIns="25400" bIns="25400" rtlCol="0" anchor="t">
-            <a:normAutofit/>
+            <a:ext cx="10339246" cy="389558"/>
+          </a:xfrm>
+          <a:prstGeom prst="rect">
+            <a:avLst/>
+          </a:prstGeom>
+          <a:noFill/>
+          <a:ln/>
+        </p:spPr>
+        <p:txBody>
+          <a:bodyPr wrap="square" lIns="25400" tIns="25400" rIns="25400" bIns="25400" rtlCol="0" anchor="t">
+            <a:noAutofit/>
           </a:bodyPr>
           <a:lstStyle/>
           <a:p>
@@ -14851,7 +14279,7 @@
               <a:buNone/>
             </a:pPr>
             <a:r>
-              <a:rPr lang="en-US" sz="1950" dirty="0">
+              <a:rPr lang="en-US" sz="2200" dirty="0">
                 <a:solidFill>
                   <a:srgbClr val="FFFFFF"/>
                 </a:solidFill>
@@ -14862,7 +14290,7 @@
               <a:t>Separate </a:t>
             </a:r>
             <a:r>
-              <a:rPr lang="en-US" sz="1950" b="1" dirty="0">
+              <a:rPr lang="en-US" sz="2200" b="1" dirty="0">
                 <a:solidFill>
                   <a:srgbClr val="FFFFFF"/>
                 </a:solidFill>
@@ -14873,7 +14301,7 @@
               <a:t>dev and prod </a:t>
             </a:r>
             <a:r>
-              <a:rPr lang="en-US" sz="1950" dirty="0">
+              <a:rPr lang="en-US" sz="2200" dirty="0">
                 <a:solidFill>
                   <a:srgbClr val="FFFFFF"/>
                 </a:solidFill>
@@ -14883,7 +14311,7 @@
               </a:rPr>
               <a:t>access — the Replit fix, and the obvious one nobody had</a:t>
             </a:r>
-            <a:endParaRPr lang="en-US" sz="1950" dirty="0"/>
+            <a:endParaRPr lang="en-US" sz="2200" dirty="0"/>
           </a:p>
         </p:txBody>
       </p:sp>
@@ -14906,7 +14334,7 @@
         </p:spPr>
         <p:txBody>
           <a:bodyPr wrap="square" lIns="25400" tIns="25400" rIns="25400" bIns="25400" rtlCol="0" anchor="t">
-            <a:normAutofit/>
+            <a:noAutofit/>
           </a:bodyPr>
           <a:lstStyle/>
           <a:p>
@@ -14917,7 +14345,7 @@
               <a:buNone/>
             </a:pPr>
             <a:r>
-              <a:rPr lang="en-US" sz="1650" dirty="0">
+              <a:rPr lang="en-US" sz="2200" dirty="0">
                 <a:solidFill>
                   <a:srgbClr val="FD7EF5"/>
                 </a:solidFill>
@@ -14927,7 +14355,7 @@
               </a:rPr>
               <a:t>▸</a:t>
             </a:r>
-            <a:endParaRPr lang="en-US" sz="1650" dirty="0"/>
+            <a:endParaRPr lang="en-US" sz="2200" dirty="0"/>
           </a:p>
         </p:txBody>
       </p:sp>
@@ -14940,17 +14368,17 @@
         <p:spPr>
           <a:xfrm>
             <a:off x="1307306" y="6969844"/>
-            <a:ext cx="9573243" cy="389558"/>
-          </a:xfrm>
-          <a:prstGeom prst="rect">
-            <a:avLst/>
-          </a:prstGeom>
-          <a:noFill/>
-          <a:ln/>
-        </p:spPr>
-        <p:txBody>
-          <a:bodyPr wrap="square" lIns="25400" tIns="25400" rIns="25400" bIns="25400" rtlCol="0" anchor="t">
-            <a:normAutofit/>
+            <a:ext cx="10339246" cy="389558"/>
+          </a:xfrm>
+          <a:prstGeom prst="rect">
+            <a:avLst/>
+          </a:prstGeom>
+          <a:noFill/>
+          <a:ln/>
+        </p:spPr>
+        <p:txBody>
+          <a:bodyPr wrap="square" lIns="25400" tIns="25400" rIns="25400" bIns="25400" rtlCol="0" anchor="t">
+            <a:noAutofit/>
           </a:bodyPr>
           <a:lstStyle/>
           <a:p>
@@ -14961,7 +14389,7 @@
               <a:buNone/>
             </a:pPr>
             <a:r>
-              <a:rPr lang="en-US" sz="1950" dirty="0">
+              <a:rPr lang="en-US" sz="2200" dirty="0">
                 <a:solidFill>
                   <a:srgbClr val="FFFFFF"/>
                 </a:solidFill>
@@ -14972,7 +14400,7 @@
               <a:t>Log intent </a:t>
             </a:r>
             <a:r>
-              <a:rPr lang="en-US" sz="1950" b="1" dirty="0">
+              <a:rPr lang="en-US" sz="2200" b="1" dirty="0">
                 <a:solidFill>
                   <a:srgbClr val="FFFFFF"/>
                 </a:solidFill>
@@ -14983,7 +14411,7 @@
               <a:t>and </a:t>
             </a:r>
             <a:r>
-              <a:rPr lang="en-US" sz="1950" dirty="0">
+              <a:rPr lang="en-US" sz="2200" dirty="0">
                 <a:solidFill>
                   <a:srgbClr val="FFFFFF"/>
                 </a:solidFill>
@@ -14993,7 +14421,7 @@
               </a:rPr>
               <a:t>outcome: what was requested, what was allowed, what happened</a:t>
             </a:r>
-            <a:endParaRPr lang="en-US" sz="1950" dirty="0"/>
+            <a:endParaRPr lang="en-US" sz="2200" dirty="0"/>
           </a:p>
         </p:txBody>
       </p:sp>
@@ -15155,7 +14583,7 @@
         </p:spPr>
         <p:txBody>
           <a:bodyPr wrap="square" lIns="25400" tIns="25400" rIns="25400" bIns="25400" rtlCol="0" anchor="t">
-            <a:normAutofit/>
+            <a:normAutofit lnSpcReduction="10000"/>
           </a:bodyPr>
           <a:lstStyle/>
           <a:p>
@@ -15354,7 +14782,7 @@
         </p:spPr>
         <p:txBody>
           <a:bodyPr wrap="square" lIns="25400" tIns="25400" rIns="25400" bIns="25400" rtlCol="0" anchor="t">
-            <a:normAutofit/>
+            <a:normAutofit lnSpcReduction="10000"/>
           </a:bodyPr>
           <a:lstStyle/>
           <a:p>
@@ -15606,51 +15034,7 @@
                 <a:ea typeface="Arial" pitchFamily="34" charset="-122"/>
                 <a:cs typeface="Arial" pitchFamily="34" charset="-120"/>
               </a:rPr>
-              <a:t>OWASP LLM06 Excessive Agency · Yao et al., </a:t>
-            </a:r>
-            <a:r>
-              <a:rPr lang="en-US" sz="1800" i="1" dirty="0">
-                <a:solidFill>
-                  <a:srgbClr val="C8C8C8"/>
-                </a:solidFill>
-                <a:latin typeface="Arial" pitchFamily="34" charset="0"/>
-                <a:ea typeface="Arial" pitchFamily="34" charset="-122"/>
-                <a:cs typeface="Arial" pitchFamily="34" charset="-120"/>
-              </a:rPr>
-              <a:t>ReAct </a:t>
-            </a:r>
-            <a:r>
-              <a:rPr lang="en-US" sz="1800" dirty="0">
-                <a:solidFill>
-                  <a:srgbClr val="C8C8C8"/>
-                </a:solidFill>
-                <a:latin typeface="Arial" pitchFamily="34" charset="0"/>
-                <a:ea typeface="Arial" pitchFamily="34" charset="-122"/>
-                <a:cs typeface="Arial" pitchFamily="34" charset="-120"/>
-              </a:rPr>
-              <a:t>(2022) · Hardy and Norman, </a:t>
-            </a:r>
-            <a:r>
-              <a:rPr lang="en-US" sz="1800" i="1" dirty="0">
-                <a:solidFill>
-                  <a:srgbClr val="C8C8C8"/>
-                </a:solidFill>
-                <a:latin typeface="Arial" pitchFamily="34" charset="0"/>
-                <a:ea typeface="Arial" pitchFamily="34" charset="-122"/>
-                <a:cs typeface="Arial" pitchFamily="34" charset="-120"/>
-              </a:rPr>
-              <a:t>the confused deputy </a:t>
-            </a:r>
-            <a:r>
-              <a:rPr lang="en-US" sz="1800" dirty="0">
-                <a:solidFill>
-                  <a:srgbClr val="C8C8C8"/>
-                </a:solidFill>
-                <a:latin typeface="Arial" pitchFamily="34" charset="0"/>
-                <a:ea typeface="Arial" pitchFamily="34" charset="-122"/>
-                <a:cs typeface="Arial" pitchFamily="34" charset="-120"/>
-              </a:rPr>
-              <a:t>(1988) — this problem is older than AI</a:t>
+              <a:t>OWASP LLM06 Excessive Agency · Yao et al., ReAct (2022) · Norm Hardy, “The Confused Deputy” (1988) — this problem is older than AI</a:t>
             </a:r>
             <a:endParaRPr lang="en-US" sz="1800" dirty="0"/>
           </a:p>
@@ -15762,7 +15146,7 @@
         </p:nvSpPr>
         <p:spPr>
           <a:xfrm>
-            <a:off x="990600" y="3018011"/>
+            <a:off x="990600" y="2621771"/>
             <a:ext cx="17937480" cy="314325"/>
           </a:xfrm>
           <a:prstGeom prst="rect">
@@ -15814,7 +15198,7 @@
         </p:spPr>
         <p:txBody>
           <a:bodyPr wrap="square" lIns="25400" tIns="25400" rIns="25400" bIns="25400" rtlCol="0" anchor="t">
-            <a:normAutofit/>
+            <a:normAutofit fontScale="92500" lnSpcReduction="10000"/>
           </a:bodyPr>
           <a:lstStyle/>
           <a:p>
@@ -16052,7 +15436,7 @@
         </p:spPr>
         <p:txBody>
           <a:bodyPr wrap="square" lIns="25400" tIns="25400" rIns="25400" bIns="25400" rtlCol="0" anchor="t">
-            <a:normAutofit/>
+            <a:normAutofit lnSpcReduction="10000"/>
           </a:bodyPr>
           <a:lstStyle/>
           <a:p>
@@ -16565,7 +15949,7 @@
         </p:spPr>
         <p:txBody>
           <a:bodyPr wrap="square" lIns="25400" tIns="25400" rIns="25400" bIns="25400" rtlCol="0" anchor="t">
-            <a:normAutofit/>
+            <a:normAutofit lnSpcReduction="10000"/>
           </a:bodyPr>
           <a:lstStyle/>
           <a:p>
@@ -16756,7 +16140,7 @@
         </p:spPr>
         <p:txBody>
           <a:bodyPr wrap="square" lIns="25400" tIns="25400" rIns="25400" bIns="25400" rtlCol="0" anchor="t">
-            <a:normAutofit/>
+            <a:normAutofit lnSpcReduction="10000"/>
           </a:bodyPr>
           <a:lstStyle/>
           <a:p>
@@ -16811,7 +16195,7 @@
         </p:spPr>
         <p:txBody>
           <a:bodyPr wrap="square" lIns="25400" tIns="25400" rIns="25400" bIns="25400" rtlCol="0" anchor="t">
-            <a:normAutofit/>
+            <a:normAutofit lnSpcReduction="10000"/>
           </a:bodyPr>
           <a:lstStyle/>
           <a:p>
@@ -16969,7 +16353,7 @@
                 <a:ea typeface="Courier New" pitchFamily="34" charset="-122"/>
                 <a:cs typeface="Courier New" pitchFamily="34" charset="-120"/>
               </a:rPr>
-              <a:t>DEMYSTIFY IT</a:t>
+              <a:t>WHAT AN AGENT ACTUALLY IS</a:t>
             </a:r>
             <a:endParaRPr lang="en-US" sz="1500" dirty="0"/>
           </a:p>
@@ -16994,7 +16378,7 @@
         </p:spPr>
         <p:txBody>
           <a:bodyPr wrap="square" lIns="25400" tIns="25400" rIns="25400" bIns="25400" rtlCol="0" anchor="t">
-            <a:normAutofit/>
+            <a:normAutofit lnSpcReduction="10000"/>
           </a:bodyPr>
           <a:lstStyle/>
           <a:p>
@@ -17027,8 +16411,8 @@
         </p:nvSpPr>
         <p:spPr>
           <a:xfrm>
-            <a:off x="990600" y="4111749"/>
-            <a:ext cx="16306800" cy="2363986"/>
+            <a:off x="990600" y="4111748"/>
+            <a:ext cx="16306800" cy="3066291"/>
           </a:xfrm>
           <a:prstGeom prst="roundRect">
             <a:avLst>
@@ -17225,18 +16609,12 @@
         </p:spPr>
         <p:txBody>
           <a:bodyPr wrap="square" lIns="25400" tIns="25400" rIns="25400" bIns="25400" rtlCol="0" anchor="t">
-            <a:normAutofit/>
-          </a:bodyPr>
-          <a:lstStyle/>
-          <a:p>
-            <a:pPr marL="0" indent="0" algn="l">
-              <a:lnSpc>
-                <a:spcPct val="145200"/>
-              </a:lnSpc>
-              <a:buNone/>
-            </a:pPr>
-            <a:r>
-              <a:rPr lang="en-US" sz="1650" dirty="0">
+            <a:noAutofit/>
+          </a:bodyPr>
+          <a:lstStyle/>
+          <a:p>
+            <a:r>
+              <a:rPr lang="en-US" sz="2400" dirty="0">
                 <a:solidFill>
                   <a:srgbClr val="C8C8C8"/>
                 </a:solidFill>
@@ -17246,17 +16624,10 @@
               </a:rPr>
               <a:t>1. give the model a menu of tools (name, description, parameters)</a:t>
             </a:r>
-            <a:endParaRPr lang="en-US" sz="1650" dirty="0"/>
-          </a:p>
-          <a:p>
-            <a:pPr marL="0" indent="0" algn="l">
-              <a:lnSpc>
-                <a:spcPct val="145200"/>
-              </a:lnSpc>
-              <a:buNone/>
-            </a:pPr>
-            <a:r>
-              <a:rPr lang="en-US" sz="1650" dirty="0">
+          </a:p>
+          <a:p>
+            <a:r>
+              <a:rPr lang="en-US" sz="2400" dirty="0">
                 <a:solidFill>
                   <a:srgbClr val="C8C8C8"/>
                 </a:solidFill>
@@ -17266,17 +16637,10 @@
               </a:rPr>
               <a:t>2. model replies with either prose OR a structured {tool, args} request</a:t>
             </a:r>
-            <a:endParaRPr lang="en-US" sz="1650" dirty="0"/>
-          </a:p>
-          <a:p>
-            <a:pPr marL="0" indent="0" algn="l">
-              <a:lnSpc>
-                <a:spcPct val="145200"/>
-              </a:lnSpc>
-              <a:buNone/>
-            </a:pPr>
-            <a:r>
-              <a:rPr lang="en-US" sz="1650" dirty="0">
+          </a:p>
+          <a:p>
+            <a:r>
+              <a:rPr lang="en-US" sz="2400" dirty="0">
                 <a:solidFill>
                   <a:srgbClr val="C8C8C8"/>
                 </a:solidFill>
@@ -17284,40 +16648,21 @@
                 <a:ea typeface="Courier New" pitchFamily="34" charset="-122"/>
                 <a:cs typeface="Courier New" pitchFamily="34" charset="-120"/>
               </a:rPr>
-              <a:t>3.  </a:t>
-            </a:r>
-            <a:endParaRPr lang="en-US" sz="1650" dirty="0"/>
-          </a:p>
-          <a:p>
-            <a:pPr marL="0" indent="0" algn="l">
-              <a:lnSpc>
-                <a:spcPct val="145200"/>
-              </a:lnSpc>
-              <a:buNone/>
-            </a:pPr>
-            <a:r>
-              <a:rPr lang="en-US" sz="1650" dirty="0">
-                <a:solidFill>
-                  <a:srgbClr val="FD7EF5"/>
+              <a:t>3. WE execute the tool and feed the result back</a:t>
+            </a:r>
+          </a:p>
+          <a:p>
+            <a:r>
+              <a:rPr lang="en-US" sz="2400" dirty="0">
+                <a:solidFill>
+                  <a:srgbClr val="C8C8C8"/>
                 </a:solidFill>
                 <a:latin typeface="Courier New" pitchFamily="34" charset="0"/>
                 <a:ea typeface="Courier New" pitchFamily="34" charset="-122"/>
                 <a:cs typeface="Courier New" pitchFamily="34" charset="-120"/>
               </a:rPr>
-              <a:t>WE execute the tool and feed the result back </a:t>
-            </a:r>
-            <a:r>
-              <a:rPr lang="en-US" sz="1650" dirty="0">
-                <a:solidFill>
-                  <a:srgbClr val="C8C8C8"/>
-                </a:solidFill>
-                <a:latin typeface="Courier New" pitchFamily="34" charset="0"/>
-                <a:ea typeface="Courier New" pitchFamily="34" charset="-122"/>
-                <a:cs typeface="Courier New" pitchFamily="34" charset="-120"/>
-              </a:rPr>
-              <a:t>4. repeat until a final answer (or we hit a step cap)</a:t>
-            </a:r>
-            <a:endParaRPr lang="en-US" sz="1650" dirty="0"/>
+              <a:t>4. repeat until the model returns a final answer (or we hit a step cap)</a:t>
+            </a:r>
           </a:p>
         </p:txBody>
       </p:sp>
@@ -17329,7 +16674,7 @@
         </p:nvSpPr>
         <p:spPr>
           <a:xfrm>
-            <a:off x="990600" y="6799585"/>
+            <a:off x="1053465" y="7721538"/>
             <a:ext cx="17811750" cy="443359"/>
           </a:xfrm>
           <a:prstGeom prst="rect">
@@ -17556,7 +16901,7 @@
         </p:spPr>
         <p:txBody>
           <a:bodyPr wrap="square" lIns="25400" tIns="25400" rIns="25400" bIns="25400" rtlCol="0" anchor="t">
-            <a:normAutofit/>
+            <a:normAutofit lnSpcReduction="10000"/>
           </a:bodyPr>
           <a:lstStyle/>
           <a:p>
@@ -17590,7 +16935,7 @@
         <p:spPr>
           <a:xfrm>
             <a:off x="990600" y="4434855"/>
-            <a:ext cx="3919537" cy="1877318"/>
+            <a:ext cx="3919537" cy="2163068"/>
           </a:xfrm>
           <a:prstGeom prst="roundRect">
             <a:avLst>
@@ -17610,7 +16955,7 @@
           <a:bodyPr/>
           <a:lstStyle/>
           <a:p>
-            <a:endParaRPr lang="en-US"/>
+            <a:endParaRPr lang="en-US" sz="2000"/>
           </a:p>
         </p:txBody>
       </p:sp>
@@ -17633,15 +16978,15 @@
         </p:spPr>
         <p:txBody>
           <a:bodyPr wrap="square" lIns="25400" tIns="25400" rIns="25400" bIns="25400" rtlCol="0" anchor="t">
-            <a:normAutofit/>
-          </a:bodyPr>
-          <a:lstStyle/>
-          <a:p>
-            <a:pPr marL="0" indent="0" algn="l">
-              <a:buNone/>
-            </a:pPr>
-            <a:r>
-              <a:rPr lang="en-US" sz="1500" kern="0" spc="150" dirty="0">
+            <a:noAutofit/>
+          </a:bodyPr>
+          <a:lstStyle/>
+          <a:p>
+            <a:pPr marL="0" indent="0" algn="l">
+              <a:buNone/>
+            </a:pPr>
+            <a:r>
+              <a:rPr lang="en-US" sz="2000" kern="0" spc="150" dirty="0">
                 <a:solidFill>
                   <a:srgbClr val="36CDFF"/>
                 </a:solidFill>
@@ -17651,7 +16996,7 @@
               </a:rPr>
               <a:t>01</a:t>
             </a:r>
-            <a:endParaRPr lang="en-US" sz="1500" dirty="0"/>
+            <a:endParaRPr lang="en-US" sz="2000" dirty="0"/>
           </a:p>
         </p:txBody>
       </p:sp>
@@ -17674,7 +17019,7 @@
         </p:spPr>
         <p:txBody>
           <a:bodyPr wrap="square" lIns="25400" tIns="25400" rIns="25400" bIns="25400" rtlCol="0" anchor="t">
-            <a:normAutofit/>
+            <a:noAutofit/>
           </a:bodyPr>
           <a:lstStyle/>
           <a:p>
@@ -17685,7 +17030,7 @@
               <a:buNone/>
             </a:pPr>
             <a:r>
-              <a:rPr lang="en-US" sz="1950" dirty="0">
+              <a:rPr lang="en-US" sz="2000" dirty="0">
                 <a:solidFill>
                   <a:srgbClr val="FFFFFF"/>
                 </a:solidFill>
@@ -17695,7 +17040,7 @@
               </a:rPr>
               <a:t>The LLM</a:t>
             </a:r>
-            <a:endParaRPr lang="en-US" sz="1950" dirty="0"/>
+            <a:endParaRPr lang="en-US" sz="2000" dirty="0"/>
           </a:p>
         </p:txBody>
       </p:sp>
@@ -17718,7 +17063,7 @@
         </p:spPr>
         <p:txBody>
           <a:bodyPr wrap="square" lIns="25400" tIns="25400" rIns="25400" bIns="25400" rtlCol="0" anchor="t">
-            <a:normAutofit/>
+            <a:noAutofit/>
           </a:bodyPr>
           <a:lstStyle/>
           <a:p>
@@ -17729,7 +17074,7 @@
               <a:buNone/>
             </a:pPr>
             <a:r>
-              <a:rPr lang="en-US" sz="1575" i="1" dirty="0">
+              <a:rPr lang="en-US" sz="2000" i="1" dirty="0">
                 <a:solidFill>
                   <a:srgbClr val="969696"/>
                 </a:solidFill>
@@ -17740,7 +17085,7 @@
               <a:t>The brain. </a:t>
             </a:r>
             <a:r>
-              <a:rPr lang="en-US" sz="1575" dirty="0">
+              <a:rPr lang="en-US" sz="2000" dirty="0">
                 <a:solidFill>
                   <a:srgbClr val="969696"/>
                 </a:solidFill>
@@ -17750,7 +17095,7 @@
               </a:rPr>
               <a:t>The reasoning engine that makes decisions.</a:t>
             </a:r>
-            <a:endParaRPr lang="en-US" sz="1575" dirty="0"/>
+            <a:endParaRPr lang="en-US" sz="2000" dirty="0"/>
           </a:p>
         </p:txBody>
       </p:sp>
@@ -17763,7 +17108,7 @@
         <p:spPr>
           <a:xfrm>
             <a:off x="5119688" y="4434855"/>
-            <a:ext cx="3919537" cy="1877318"/>
+            <a:ext cx="3919537" cy="2163068"/>
           </a:xfrm>
           <a:prstGeom prst="roundRect">
             <a:avLst>
@@ -17786,7 +17131,7 @@
           <a:bodyPr/>
           <a:lstStyle/>
           <a:p>
-            <a:endParaRPr lang="en-US"/>
+            <a:endParaRPr lang="en-US" sz="2000"/>
           </a:p>
         </p:txBody>
       </p:sp>
@@ -17809,15 +17154,15 @@
         </p:spPr>
         <p:txBody>
           <a:bodyPr wrap="square" lIns="25400" tIns="25400" rIns="25400" bIns="25400" rtlCol="0" anchor="t">
-            <a:normAutofit/>
-          </a:bodyPr>
-          <a:lstStyle/>
-          <a:p>
-            <a:pPr marL="0" indent="0" algn="l">
-              <a:buNone/>
-            </a:pPr>
-            <a:r>
-              <a:rPr lang="en-US" sz="1500" kern="0" spc="150" dirty="0">
+            <a:noAutofit/>
+          </a:bodyPr>
+          <a:lstStyle/>
+          <a:p>
+            <a:pPr marL="0" indent="0" algn="l">
+              <a:buNone/>
+            </a:pPr>
+            <a:r>
+              <a:rPr lang="en-US" sz="2000" kern="0" spc="150" dirty="0">
                 <a:solidFill>
                   <a:srgbClr val="FD7EF5"/>
                 </a:solidFill>
@@ -17827,7 +17172,7 @@
               </a:rPr>
               <a:t>02</a:t>
             </a:r>
-            <a:endParaRPr lang="en-US" sz="1500" dirty="0"/>
+            <a:endParaRPr lang="en-US" sz="2000" dirty="0"/>
           </a:p>
         </p:txBody>
       </p:sp>
@@ -17850,7 +17195,7 @@
         </p:spPr>
         <p:txBody>
           <a:bodyPr wrap="square" lIns="25400" tIns="25400" rIns="25400" bIns="25400" rtlCol="0" anchor="t">
-            <a:normAutofit/>
+            <a:noAutofit/>
           </a:bodyPr>
           <a:lstStyle/>
           <a:p>
@@ -17861,7 +17206,7 @@
               <a:buNone/>
             </a:pPr>
             <a:r>
-              <a:rPr lang="en-US" sz="1950" dirty="0">
+              <a:rPr lang="en-US" sz="2000" dirty="0">
                 <a:solidFill>
                   <a:srgbClr val="FFFFFF"/>
                 </a:solidFill>
@@ -17871,7 +17216,7 @@
               </a:rPr>
               <a:t>The tools</a:t>
             </a:r>
-            <a:endParaRPr lang="en-US" sz="1950" dirty="0"/>
+            <a:endParaRPr lang="en-US" sz="2000" dirty="0"/>
           </a:p>
         </p:txBody>
       </p:sp>
@@ -17894,7 +17239,7 @@
         </p:spPr>
         <p:txBody>
           <a:bodyPr wrap="square" lIns="25400" tIns="25400" rIns="25400" bIns="25400" rtlCol="0" anchor="t">
-            <a:normAutofit/>
+            <a:noAutofit/>
           </a:bodyPr>
           <a:lstStyle/>
           <a:p>
@@ -17905,7 +17250,7 @@
               <a:buNone/>
             </a:pPr>
             <a:r>
-              <a:rPr lang="en-US" sz="1575" i="1" dirty="0">
+              <a:rPr lang="en-US" sz="2000" i="1" dirty="0">
                 <a:solidFill>
                   <a:srgbClr val="969696"/>
                 </a:solidFill>
@@ -17916,7 +17261,7 @@
               <a:t>The hands. </a:t>
             </a:r>
             <a:r>
-              <a:rPr lang="en-US" sz="1575" dirty="0">
+              <a:rPr lang="en-US" sz="2000" dirty="0">
                 <a:solidFill>
                   <a:srgbClr val="969696"/>
                 </a:solidFill>
@@ -17926,7 +17271,7 @@
               </a:rPr>
               <a:t>Functions the agent can call — APIs, code execution.</a:t>
             </a:r>
-            <a:endParaRPr lang="en-US" sz="1575" dirty="0"/>
+            <a:endParaRPr lang="en-US" sz="2000" dirty="0"/>
           </a:p>
         </p:txBody>
       </p:sp>
@@ -17939,7 +17284,7 @@
         <p:spPr>
           <a:xfrm>
             <a:off x="9248775" y="4434855"/>
-            <a:ext cx="3919537" cy="1877318"/>
+            <a:ext cx="3919537" cy="2163068"/>
           </a:xfrm>
           <a:prstGeom prst="roundRect">
             <a:avLst>
@@ -17959,7 +17304,7 @@
           <a:bodyPr/>
           <a:lstStyle/>
           <a:p>
-            <a:endParaRPr lang="en-US"/>
+            <a:endParaRPr lang="en-US" sz="2000"/>
           </a:p>
         </p:txBody>
       </p:sp>
@@ -17982,15 +17327,15 @@
         </p:spPr>
         <p:txBody>
           <a:bodyPr wrap="square" lIns="25400" tIns="25400" rIns="25400" bIns="25400" rtlCol="0" anchor="t">
-            <a:normAutofit/>
-          </a:bodyPr>
-          <a:lstStyle/>
-          <a:p>
-            <a:pPr marL="0" indent="0" algn="l">
-              <a:buNone/>
-            </a:pPr>
-            <a:r>
-              <a:rPr lang="en-US" sz="1500" kern="0" spc="150" dirty="0">
+            <a:noAutofit/>
+          </a:bodyPr>
+          <a:lstStyle/>
+          <a:p>
+            <a:pPr marL="0" indent="0" algn="l">
+              <a:buNone/>
+            </a:pPr>
+            <a:r>
+              <a:rPr lang="en-US" sz="2000" kern="0" spc="150" dirty="0">
                 <a:solidFill>
                   <a:srgbClr val="36CDFF"/>
                 </a:solidFill>
@@ -18000,7 +17345,7 @@
               </a:rPr>
               <a:t>03</a:t>
             </a:r>
-            <a:endParaRPr lang="en-US" sz="1500" dirty="0"/>
+            <a:endParaRPr lang="en-US" sz="2000" dirty="0"/>
           </a:p>
         </p:txBody>
       </p:sp>
@@ -18023,7 +17368,7 @@
         </p:spPr>
         <p:txBody>
           <a:bodyPr wrap="square" lIns="25400" tIns="25400" rIns="25400" bIns="25400" rtlCol="0" anchor="t">
-            <a:normAutofit/>
+            <a:noAutofit/>
           </a:bodyPr>
           <a:lstStyle/>
           <a:p>
@@ -18034,7 +17379,7 @@
               <a:buNone/>
             </a:pPr>
             <a:r>
-              <a:rPr lang="en-US" sz="1950" dirty="0">
+              <a:rPr lang="en-US" sz="2000" dirty="0">
                 <a:solidFill>
                   <a:srgbClr val="FFFFFF"/>
                 </a:solidFill>
@@ -18044,7 +17389,7 @@
               </a:rPr>
               <a:t>The prompt</a:t>
             </a:r>
-            <a:endParaRPr lang="en-US" sz="1950" dirty="0"/>
+            <a:endParaRPr lang="en-US" sz="2000" dirty="0"/>
           </a:p>
         </p:txBody>
       </p:sp>
@@ -18067,7 +17412,7 @@
         </p:spPr>
         <p:txBody>
           <a:bodyPr wrap="square" lIns="25400" tIns="25400" rIns="25400" bIns="25400" rtlCol="0" anchor="t">
-            <a:normAutofit/>
+            <a:noAutofit/>
           </a:bodyPr>
           <a:lstStyle/>
           <a:p>
@@ -18078,7 +17423,7 @@
               <a:buNone/>
             </a:pPr>
             <a:r>
-              <a:rPr lang="en-US" sz="1575" i="1" dirty="0">
+              <a:rPr lang="en-US" sz="2000" i="1" dirty="0">
                 <a:solidFill>
                   <a:srgbClr val="969696"/>
                 </a:solidFill>
@@ -18089,7 +17434,7 @@
               <a:t>The job description. </a:t>
             </a:r>
             <a:r>
-              <a:rPr lang="en-US" sz="1575" dirty="0">
+              <a:rPr lang="en-US" sz="2000" dirty="0">
                 <a:solidFill>
                   <a:srgbClr val="969696"/>
                 </a:solidFill>
@@ -18099,7 +17444,7 @@
               </a:rPr>
               <a:t>The agent’s core instructions.</a:t>
             </a:r>
-            <a:endParaRPr lang="en-US" sz="1575" dirty="0"/>
+            <a:endParaRPr lang="en-US" sz="2000" dirty="0"/>
           </a:p>
         </p:txBody>
       </p:sp>
@@ -18112,7 +17457,7 @@
         <p:spPr>
           <a:xfrm>
             <a:off x="13377863" y="4434855"/>
-            <a:ext cx="3919537" cy="1877318"/>
+            <a:ext cx="3919537" cy="2163068"/>
           </a:xfrm>
           <a:prstGeom prst="roundRect">
             <a:avLst>
@@ -18132,7 +17477,7 @@
           <a:bodyPr/>
           <a:lstStyle/>
           <a:p>
-            <a:endParaRPr lang="en-US"/>
+            <a:endParaRPr lang="en-US" sz="2000"/>
           </a:p>
         </p:txBody>
       </p:sp>
@@ -18155,15 +17500,15 @@
         </p:spPr>
         <p:txBody>
           <a:bodyPr wrap="square" lIns="25400" tIns="25400" rIns="25400" bIns="25400" rtlCol="0" anchor="t">
-            <a:normAutofit/>
-          </a:bodyPr>
-          <a:lstStyle/>
-          <a:p>
-            <a:pPr marL="0" indent="0" algn="l">
-              <a:buNone/>
-            </a:pPr>
-            <a:r>
-              <a:rPr lang="en-US" sz="1500" kern="0" spc="150" dirty="0">
+            <a:noAutofit/>
+          </a:bodyPr>
+          <a:lstStyle/>
+          <a:p>
+            <a:pPr marL="0" indent="0" algn="l">
+              <a:buNone/>
+            </a:pPr>
+            <a:r>
+              <a:rPr lang="en-US" sz="2000" kern="0" spc="150" dirty="0">
                 <a:solidFill>
                   <a:srgbClr val="36CDFF"/>
                 </a:solidFill>
@@ -18173,7 +17518,7 @@
               </a:rPr>
               <a:t>04</a:t>
             </a:r>
-            <a:endParaRPr lang="en-US" sz="1500" dirty="0"/>
+            <a:endParaRPr lang="en-US" sz="2000" dirty="0"/>
           </a:p>
         </p:txBody>
       </p:sp>
@@ -18196,7 +17541,7 @@
         </p:spPr>
         <p:txBody>
           <a:bodyPr wrap="square" lIns="25400" tIns="25400" rIns="25400" bIns="25400" rtlCol="0" anchor="t">
-            <a:normAutofit/>
+            <a:noAutofit/>
           </a:bodyPr>
           <a:lstStyle/>
           <a:p>
@@ -18207,7 +17552,7 @@
               <a:buNone/>
             </a:pPr>
             <a:r>
-              <a:rPr lang="en-US" sz="1950" dirty="0">
+              <a:rPr lang="en-US" sz="2000" dirty="0">
                 <a:solidFill>
                   <a:srgbClr val="FFFFFF"/>
                 </a:solidFill>
@@ -18217,7 +17562,7 @@
               </a:rPr>
               <a:t>The executor</a:t>
             </a:r>
-            <a:endParaRPr lang="en-US" sz="1950" dirty="0"/>
+            <a:endParaRPr lang="en-US" sz="2000" dirty="0"/>
           </a:p>
         </p:txBody>
       </p:sp>
@@ -18240,7 +17585,7 @@
         </p:spPr>
         <p:txBody>
           <a:bodyPr wrap="square" lIns="25400" tIns="25400" rIns="25400" bIns="25400" rtlCol="0" anchor="t">
-            <a:normAutofit/>
+            <a:noAutofit/>
           </a:bodyPr>
           <a:lstStyle/>
           <a:p>
@@ -18251,7 +17596,7 @@
               <a:buNone/>
             </a:pPr>
             <a:r>
-              <a:rPr lang="en-US" sz="1575" i="1" dirty="0">
+              <a:rPr lang="en-US" sz="2000" i="1" dirty="0">
                 <a:solidFill>
                   <a:srgbClr val="969696"/>
                 </a:solidFill>
@@ -18262,7 +17607,7 @@
               <a:t>The engine. </a:t>
             </a:r>
             <a:r>
-              <a:rPr lang="en-US" sz="1575" dirty="0">
+              <a:rPr lang="en-US" sz="2000" dirty="0">
                 <a:solidFill>
                   <a:srgbClr val="969696"/>
                 </a:solidFill>
@@ -18272,7 +17617,7 @@
               </a:rPr>
               <a:t>The code that runs the loop.</a:t>
             </a:r>
-            <a:endParaRPr lang="en-US" sz="1575" dirty="0"/>
+            <a:endParaRPr lang="en-US" sz="2000" dirty="0"/>
           </a:p>
         </p:txBody>
       </p:sp>
@@ -18284,7 +17629,7 @@
         </p:nvSpPr>
         <p:spPr>
           <a:xfrm>
-            <a:off x="990600" y="6597923"/>
+            <a:off x="990600" y="7314753"/>
             <a:ext cx="17937480" cy="314325"/>
           </a:xfrm>
           <a:prstGeom prst="rect">
@@ -18295,7 +17640,7 @@
         </p:spPr>
         <p:txBody>
           <a:bodyPr wrap="square" lIns="25400" tIns="25400" rIns="25400" bIns="25400" rtlCol="0" anchor="t">
-            <a:normAutofit/>
+            <a:normAutofit lnSpcReduction="10000"/>
           </a:bodyPr>
           <a:lstStyle/>
           <a:p>
@@ -18497,7 +17842,7 @@
         </p:spPr>
         <p:txBody>
           <a:bodyPr wrap="square" lIns="25400" tIns="25400" rIns="25400" bIns="25400" rtlCol="0" anchor="t">
-            <a:normAutofit/>
+            <a:normAutofit lnSpcReduction="10000"/>
           </a:bodyPr>
           <a:lstStyle/>
           <a:p>
@@ -18762,7 +18107,7 @@
         </p:spPr>
         <p:txBody>
           <a:bodyPr wrap="square" lIns="25400" tIns="25400" rIns="25400" bIns="25400" rtlCol="0" anchor="t">
-            <a:normAutofit/>
+            <a:normAutofit fontScale="92500" lnSpcReduction="10000"/>
           </a:bodyPr>
           <a:lstStyle/>
           <a:p>
@@ -19005,7 +18350,7 @@
         </p:spPr>
         <p:txBody>
           <a:bodyPr wrap="square" lIns="25400" tIns="25400" rIns="25400" bIns="25400" rtlCol="0" anchor="t">
-            <a:normAutofit/>
+            <a:normAutofit fontScale="92500" lnSpcReduction="10000"/>
           </a:bodyPr>
           <a:lstStyle/>
           <a:p>
@@ -19049,7 +18394,7 @@
         </p:spPr>
         <p:txBody>
           <a:bodyPr wrap="square" lIns="25400" tIns="25400" rIns="25400" bIns="25400" rtlCol="0" anchor="t">
-            <a:normAutofit/>
+            <a:normAutofit lnSpcReduction="10000"/>
           </a:bodyPr>
           <a:lstStyle/>
           <a:p>
@@ -19093,7 +18438,7 @@
         </p:spPr>
         <p:txBody>
           <a:bodyPr wrap="square" lIns="25400" tIns="25400" rIns="25400" bIns="25400" rtlCol="0" anchor="t">
-            <a:normAutofit/>
+            <a:normAutofit lnSpcReduction="10000"/>
           </a:bodyPr>
           <a:lstStyle/>
           <a:p>
@@ -19317,7 +18662,7 @@
         </p:spPr>
         <p:txBody>
           <a:bodyPr wrap="square" lIns="25400" tIns="25400" rIns="25400" bIns="25400" rtlCol="0" anchor="t">
-            <a:normAutofit/>
+            <a:normAutofit lnSpcReduction="10000"/>
           </a:bodyPr>
           <a:lstStyle/>
           <a:p>
@@ -19351,7 +18696,7 @@
         <p:spPr>
           <a:xfrm>
             <a:off x="990600" y="3538017"/>
-            <a:ext cx="16306800" cy="3369469"/>
+            <a:ext cx="16306800" cy="5658370"/>
           </a:xfrm>
           <a:prstGeom prst="roundRect">
             <a:avLst>
@@ -19548,18 +18893,12 @@
         </p:spPr>
         <p:txBody>
           <a:bodyPr wrap="square" lIns="25400" tIns="25400" rIns="25400" bIns="25400" rtlCol="0" anchor="t">
-            <a:normAutofit/>
-          </a:bodyPr>
-          <a:lstStyle/>
-          <a:p>
-            <a:pPr marL="0" indent="0" algn="l">
-              <a:lnSpc>
-                <a:spcPct val="145814"/>
-              </a:lnSpc>
-              <a:buNone/>
-            </a:pPr>
-            <a:r>
-              <a:rPr lang="en-US" sz="1425" dirty="0">
+            <a:noAutofit/>
+          </a:bodyPr>
+          <a:lstStyle/>
+          <a:p>
+            <a:r>
+              <a:rPr lang="en-US" sz="2200" dirty="0">
                 <a:solidFill>
                   <a:srgbClr val="C8C8C8"/>
                 </a:solidFill>
@@ -19567,19 +18906,12 @@
                 <a:ea typeface="Courier New" pitchFamily="34" charset="-122"/>
                 <a:cs typeface="Courier New" pitchFamily="34" charset="-120"/>
               </a:rPr>
-              <a:t>// we hand the model schemas:</a:t>
-            </a:r>
-            <a:endParaRPr lang="en-US" sz="1425" dirty="0"/>
-          </a:p>
-          <a:p>
-            <a:pPr marL="0" indent="0" algn="l">
-              <a:lnSpc>
-                <a:spcPct val="145814"/>
-              </a:lnSpc>
-              <a:buNone/>
-            </a:pPr>
-            <a:r>
-              <a:rPr lang="en-US" sz="1425" dirty="0">
+              <a:t>{"name": "transfer_funds", "description": "Transfer money to an account",</a:t>
+            </a:r>
+          </a:p>
+          <a:p>
+            <a:r>
+              <a:rPr lang="en-US" sz="2200" dirty="0">
                 <a:solidFill>
                   <a:srgbClr val="C8C8C8"/>
                 </a:solidFill>
@@ -19587,30 +18919,25 @@
                 <a:ea typeface="Courier New" pitchFamily="34" charset="-122"/>
                 <a:cs typeface="Courier New" pitchFamily="34" charset="-120"/>
               </a:rPr>
-              <a:t>{"name": "transfer_funds",  </a:t>
-            </a:r>
-            <a:endParaRPr lang="en-US" sz="1425" dirty="0"/>
-          </a:p>
-          <a:p>
-            <a:pPr marL="0" indent="0" algn="l">
-              <a:lnSpc>
-                <a:spcPct val="145814"/>
-              </a:lnSpc>
-              <a:buNone/>
-            </a:pPr>
-            <a:r>
-              <a:rPr lang="en-US" sz="1425" dirty="0">
-                <a:solidFill>
-                  <a:srgbClr val="FD7EF5"/>
+              <a:t> "parameters": {"type": "object",</a:t>
+            </a:r>
+          </a:p>
+          <a:p>
+            <a:r>
+              <a:rPr lang="en-US" sz="2200" dirty="0">
+                <a:solidFill>
+                  <a:srgbClr val="C8C8C8"/>
                 </a:solidFill>
                 <a:latin typeface="Courier New" pitchFamily="34" charset="0"/>
                 <a:ea typeface="Courier New" pitchFamily="34" charset="-122"/>
                 <a:cs typeface="Courier New" pitchFamily="34" charset="-120"/>
               </a:rPr>
-              <a:t>"description": "Transfer money to an account" </a:t>
-            </a:r>
-            <a:r>
-              <a:rPr lang="en-US" sz="1425" dirty="0">
+              <a:t>   "properties": {"to_account": {"type": "string"}, "amount": {"type": "integer"}},</a:t>
+            </a:r>
+          </a:p>
+          <a:p>
+            <a:r>
+              <a:rPr lang="en-US" sz="2200" dirty="0">
                 <a:solidFill>
                   <a:srgbClr val="C8C8C8"/>
                 </a:solidFill>
@@ -19618,149 +18945,8 @@
                 <a:ea typeface="Courier New" pitchFamily="34" charset="-122"/>
                 <a:cs typeface="Courier New" pitchFamily="34" charset="-120"/>
               </a:rPr>
-              <a:t>,</a:t>
-            </a:r>
-            <a:endParaRPr lang="en-US" sz="1425" dirty="0"/>
-          </a:p>
-          <a:p>
-            <a:pPr marL="0" indent="0" algn="l">
-              <a:lnSpc>
-                <a:spcPct val="145814"/>
-              </a:lnSpc>
-              <a:buNone/>
-            </a:pPr>
-            <a:r>
-              <a:rPr lang="en-US" sz="1425" dirty="0">
-                <a:solidFill>
-                  <a:srgbClr val="C8C8C8"/>
-                </a:solidFill>
-                <a:latin typeface="Courier New" pitchFamily="34" charset="0"/>
-                <a:ea typeface="Courier New" pitchFamily="34" charset="-122"/>
-                <a:cs typeface="Courier New" pitchFamily="34" charset="-120"/>
-              </a:rPr>
-              <a:t> "parameters": {"type": "object",</a:t>
-            </a:r>
-            <a:endParaRPr lang="en-US" sz="1425" dirty="0"/>
-          </a:p>
-          <a:p>
-            <a:pPr marL="0" indent="0" algn="l">
-              <a:lnSpc>
-                <a:spcPct val="145814"/>
-              </a:lnSpc>
-              <a:buNone/>
-            </a:pPr>
-            <a:r>
-              <a:rPr lang="en-US" sz="1425" dirty="0">
-                <a:solidFill>
-                  <a:srgbClr val="C8C8C8"/>
-                </a:solidFill>
-                <a:latin typeface="Courier New" pitchFamily="34" charset="0"/>
-                <a:ea typeface="Courier New" pitchFamily="34" charset="-122"/>
-                <a:cs typeface="Courier New" pitchFamily="34" charset="-120"/>
-              </a:rPr>
-              <a:t>   "properties": {"to_account": {"type": "string"}, "amount": {"type": "integer"}},</a:t>
-            </a:r>
-            <a:endParaRPr lang="en-US" sz="1425" dirty="0"/>
-          </a:p>
-          <a:p>
-            <a:pPr marL="0" indent="0" algn="l">
-              <a:lnSpc>
-                <a:spcPct val="145814"/>
-              </a:lnSpc>
-              <a:buNone/>
-            </a:pPr>
-            <a:r>
-              <a:rPr lang="en-US" sz="1425" dirty="0">
-                <a:solidFill>
-                  <a:srgbClr val="C8C8C8"/>
-                </a:solidFill>
-                <a:latin typeface="Courier New" pitchFamily="34" charset="0"/>
-                <a:ea typeface="Courier New" pitchFamily="34" charset="-122"/>
-                <a:cs typeface="Courier New" pitchFamily="34" charset="-120"/>
-              </a:rPr>
               <a:t>   "required": ["to_account", "amount"]}}</a:t>
             </a:r>
-            <a:endParaRPr lang="en-US" sz="1425" dirty="0"/>
-          </a:p>
-          <a:p>
-            <a:pPr marL="0" indent="0" algn="l">
-              <a:lnSpc>
-                <a:spcPct val="145814"/>
-              </a:lnSpc>
-              <a:buNone/>
-            </a:pPr>
-            <a:endParaRPr lang="en-US" sz="1425" dirty="0"/>
-          </a:p>
-          <a:p>
-            <a:pPr marL="0" indent="0" algn="l">
-              <a:lnSpc>
-                <a:spcPct val="145814"/>
-              </a:lnSpc>
-              <a:buNone/>
-            </a:pPr>
-            <a:r>
-              <a:rPr lang="en-US" sz="1425" dirty="0">
-                <a:solidFill>
-                  <a:srgbClr val="C8C8C8"/>
-                </a:solidFill>
-                <a:latin typeface="Courier New" pitchFamily="34" charset="0"/>
-                <a:ea typeface="Courier New" pitchFamily="34" charset="-122"/>
-                <a:cs typeface="Courier New" pitchFamily="34" charset="-120"/>
-              </a:rPr>
-              <a:t>// it replies with structured JSON instead of prose:</a:t>
-            </a:r>
-            <a:endParaRPr lang="en-US" sz="1425" dirty="0"/>
-          </a:p>
-          <a:p>
-            <a:pPr marL="0" indent="0" algn="l">
-              <a:lnSpc>
-                <a:spcPct val="145814"/>
-              </a:lnSpc>
-              <a:buNone/>
-            </a:pPr>
-            <a:r>
-              <a:rPr lang="en-US" sz="1425" dirty="0">
-                <a:solidFill>
-                  <a:srgbClr val="C8C8C8"/>
-                </a:solidFill>
-                <a:latin typeface="Courier New" pitchFamily="34" charset="0"/>
-                <a:ea typeface="Courier New" pitchFamily="34" charset="-122"/>
-                <a:cs typeface="Courier New" pitchFamily="34" charset="-120"/>
-              </a:rPr>
-              <a:t>{"tool": "transfer_funds", "args": {"to_account":  </a:t>
-            </a:r>
-            <a:endParaRPr lang="en-US" sz="1425" dirty="0"/>
-          </a:p>
-          <a:p>
-            <a:pPr marL="0" indent="0" algn="l">
-              <a:lnSpc>
-                <a:spcPct val="145814"/>
-              </a:lnSpc>
-              <a:buNone/>
-            </a:pPr>
-            <a:r>
-              <a:rPr lang="en-US" sz="1425" dirty="0">
-                <a:solidFill>
-                  <a:srgbClr val="FD7EF5"/>
-                </a:solidFill>
-                <a:latin typeface="Courier New" pitchFamily="34" charset="0"/>
-                <a:ea typeface="Courier New" pitchFamily="34" charset="-122"/>
-                <a:cs typeface="Courier New" pitchFamily="34" charset="-120"/>
-              </a:rPr>
-              <a:t>"acct-attacker"</a:t>
-            </a:r>
-            <a:r>
-              <a:rPr lang="en-US" sz="1425" dirty="0">
-                <a:solidFill>
-                  <a:srgbClr val="C8C8C8"/>
-                </a:solidFill>
-                <a:latin typeface="Courier New" pitchFamily="34" charset="0"/>
-                <a:ea typeface="Courier New" pitchFamily="34" charset="-122"/>
-                <a:cs typeface="Courier New" pitchFamily="34" charset="-120"/>
-              </a:rPr>
-              <a:t>, "amount": 500}}</a:t>
-            </a:r>
-            <a:endParaRPr lang="en-US" sz="1425" dirty="0"/>
           </a:p>
         </p:txBody>
       </p:sp>
@@ -19772,7 +18958,7 @@
         </p:nvSpPr>
         <p:spPr>
           <a:xfrm>
-            <a:off x="990600" y="7698062"/>
+            <a:off x="990600" y="3018458"/>
             <a:ext cx="17811750" cy="448121"/>
           </a:xfrm>
           <a:prstGeom prst="rect">
@@ -20032,7 +19218,7 @@
         </p:spPr>
         <p:txBody>
           <a:bodyPr wrap="square" lIns="25400" tIns="25400" rIns="25400" bIns="25400" rtlCol="0" anchor="t">
-            <a:normAutofit/>
+            <a:normAutofit lnSpcReduction="10000"/>
           </a:bodyPr>
           <a:lstStyle/>
           <a:p>
@@ -20066,7 +19252,7 @@
         <p:spPr>
           <a:xfrm>
             <a:off x="990600" y="3477295"/>
-            <a:ext cx="16306800" cy="3495675"/>
+            <a:ext cx="16306800" cy="5114777"/>
           </a:xfrm>
           <a:prstGeom prst="roundRect">
             <a:avLst>
@@ -20263,29 +19449,25 @@
         </p:spPr>
         <p:txBody>
           <a:bodyPr wrap="square" lIns="25400" tIns="25400" rIns="25400" bIns="25400" rtlCol="0" anchor="t">
-            <a:normAutofit/>
-          </a:bodyPr>
-          <a:lstStyle/>
-          <a:p>
-            <a:pPr marL="0" indent="0" algn="l">
-              <a:lnSpc>
-                <a:spcPct val="146667"/>
-              </a:lnSpc>
-              <a:buNone/>
-            </a:pPr>
-            <a:r>
-              <a:rPr lang="en-US" sz="1500" dirty="0">
-                <a:solidFill>
-                  <a:srgbClr val="36CDFF"/>
+            <a:noAutofit/>
+          </a:bodyPr>
+          <a:lstStyle/>
+          <a:p>
+            <a:r>
+              <a:rPr lang="en-US" sz="2400" dirty="0">
+                <a:solidFill>
+                  <a:srgbClr val="C8C8C8"/>
                 </a:solidFill>
                 <a:latin typeface="Courier New" pitchFamily="34" charset="0"/>
                 <a:ea typeface="Courier New" pitchFamily="34" charset="-122"/>
                 <a:cs typeface="Courier New" pitchFamily="34" charset="-120"/>
               </a:rPr>
-              <a:t>Thought: </a:t>
-            </a:r>
-            <a:r>
-              <a:rPr lang="en-US" sz="1500" dirty="0">
+              <a:t>Thought:  I should check the balance first</a:t>
+            </a:r>
+          </a:p>
+          <a:p>
+            <a:r>
+              <a:rPr lang="en-US" sz="2400" dirty="0">
                 <a:solidFill>
                   <a:srgbClr val="C8C8C8"/>
                 </a:solidFill>
@@ -20293,19 +19475,12 @@
                 <a:ea typeface="Courier New" pitchFamily="34" charset="-122"/>
                 <a:cs typeface="Courier New" pitchFamily="34" charset="-120"/>
               </a:rPr>
-              <a:t>  I should check the balance first</a:t>
-            </a:r>
-            <a:endParaRPr lang="en-US" sz="1500" dirty="0"/>
-          </a:p>
-          <a:p>
-            <a:pPr marL="0" indent="0" algn="l">
-              <a:lnSpc>
-                <a:spcPct val="146667"/>
-              </a:lnSpc>
-              <a:buNone/>
-            </a:pPr>
-            <a:r>
-              <a:rPr lang="en-US" sz="1500" dirty="0">
+              <a:t>Action:   get_balance(account="acct-me")</a:t>
+            </a:r>
+          </a:p>
+          <a:p>
+            <a:r>
+              <a:rPr lang="en-US" sz="2400" dirty="0">
                 <a:solidFill>
                   <a:srgbClr val="C8C8C8"/>
                 </a:solidFill>
@@ -20313,19 +19488,12 @@
                 <a:ea typeface="Courier New" pitchFamily="34" charset="-122"/>
                 <a:cs typeface="Courier New" pitchFamily="34" charset="-120"/>
               </a:rPr>
-              <a:t>Action:   get_balance(account="acct-me")</a:t>
-            </a:r>
-            <a:endParaRPr lang="en-US" sz="1500" dirty="0"/>
-          </a:p>
-          <a:p>
-            <a:pPr marL="0" indent="0" algn="l">
-              <a:lnSpc>
-                <a:spcPct val="146667"/>
-              </a:lnSpc>
-              <a:buNone/>
-            </a:pPr>
-            <a:r>
-              <a:rPr lang="en-US" sz="1500" dirty="0">
+              <a:t>Observation: balance: 1000</a:t>
+            </a:r>
+          </a:p>
+          <a:p>
+            <a:r>
+              <a:rPr lang="en-US" sz="2400" dirty="0">
                 <a:solidFill>
                   <a:srgbClr val="C8C8C8"/>
                 </a:solidFill>
@@ -20333,30 +19501,25 @@
                 <a:ea typeface="Courier New" pitchFamily="34" charset="-122"/>
                 <a:cs typeface="Courier New" pitchFamily="34" charset="-120"/>
               </a:rPr>
-              <a:t>Observation: balance: 1000 </a:t>
-            </a:r>
-            <a:endParaRPr lang="en-US" sz="1500" dirty="0"/>
-          </a:p>
-          <a:p>
-            <a:pPr marL="0" indent="0" algn="l">
-              <a:lnSpc>
-                <a:spcPct val="146667"/>
-              </a:lnSpc>
-              <a:buNone/>
-            </a:pPr>
-            <a:r>
-              <a:rPr lang="en-US" sz="1500" dirty="0">
-                <a:solidFill>
-                  <a:srgbClr val="36CDFF"/>
+              <a:t>Thought:  now I can issue the refund</a:t>
+            </a:r>
+          </a:p>
+          <a:p>
+            <a:r>
+              <a:rPr lang="en-US" sz="2400" dirty="0">
+                <a:solidFill>
+                  <a:srgbClr val="C8C8C8"/>
                 </a:solidFill>
                 <a:latin typeface="Courier New" pitchFamily="34" charset="0"/>
                 <a:ea typeface="Courier New" pitchFamily="34" charset="-122"/>
                 <a:cs typeface="Courier New" pitchFamily="34" charset="-120"/>
               </a:rPr>
-              <a:t>Thought: </a:t>
-            </a:r>
-            <a:r>
-              <a:rPr lang="en-US" sz="1500" dirty="0">
+              <a:t>Action:   issue_refund(to_account="acct-attacker", amount=500)</a:t>
+            </a:r>
+          </a:p>
+          <a:p>
+            <a:r>
+              <a:rPr lang="en-US" sz="2400" dirty="0">
                 <a:solidFill>
                   <a:srgbClr val="C8C8C8"/>
                 </a:solidFill>
@@ -20364,19 +19527,12 @@
                 <a:ea typeface="Courier New" pitchFamily="34" charset="-122"/>
                 <a:cs typeface="Courier New" pitchFamily="34" charset="-120"/>
               </a:rPr>
-              <a:t>  now I can issue the refund</a:t>
-            </a:r>
-            <a:endParaRPr lang="en-US" sz="1500" dirty="0"/>
-          </a:p>
-          <a:p>
-            <a:pPr marL="0" indent="0" algn="l">
-              <a:lnSpc>
-                <a:spcPct val="146667"/>
-              </a:lnSpc>
-              <a:buNone/>
-            </a:pPr>
-            <a:r>
-              <a:rPr lang="en-US" sz="1500" dirty="0">
+              <a:t>Observation: issue_refund: moved 500 to acct-attacker</a:t>
+            </a:r>
+          </a:p>
+          <a:p>
+            <a:r>
+              <a:rPr lang="en-US" sz="2400" dirty="0">
                 <a:solidFill>
                   <a:srgbClr val="C8C8C8"/>
                 </a:solidFill>
@@ -20384,82 +19540,21 @@
                 <a:ea typeface="Courier New" pitchFamily="34" charset="-122"/>
                 <a:cs typeface="Courier New" pitchFamily="34" charset="-120"/>
               </a:rPr>
-              <a:t>Action:    </a:t>
-            </a:r>
-            <a:endParaRPr lang="en-US" sz="1500" dirty="0"/>
-          </a:p>
-          <a:p>
-            <a:pPr marL="0" indent="0" algn="l">
-              <a:lnSpc>
-                <a:spcPct val="146667"/>
-              </a:lnSpc>
-              <a:buNone/>
-            </a:pPr>
-            <a:r>
-              <a:rPr lang="en-US" sz="1500" dirty="0">
-                <a:solidFill>
-                  <a:srgbClr val="FD7EF5"/>
+              <a:t>Thought:  done</a:t>
+            </a:r>
+          </a:p>
+          <a:p>
+            <a:r>
+              <a:rPr lang="en-US" sz="2400" dirty="0">
+                <a:solidFill>
+                  <a:srgbClr val="C8C8C8"/>
                 </a:solidFill>
                 <a:latin typeface="Courier New" pitchFamily="34" charset="0"/>
                 <a:ea typeface="Courier New" pitchFamily="34" charset="-122"/>
                 <a:cs typeface="Courier New" pitchFamily="34" charset="-120"/>
               </a:rPr>
-              <a:t>issue_refund(to_account="acct-attacker", amount=500) </a:t>
-            </a:r>
-            <a:r>
-              <a:rPr lang="en-US" sz="1500" dirty="0">
-                <a:solidFill>
-                  <a:srgbClr val="C8C8C8"/>
-                </a:solidFill>
-                <a:latin typeface="Courier New" pitchFamily="34" charset="0"/>
-                <a:ea typeface="Courier New" pitchFamily="34" charset="-122"/>
-                <a:cs typeface="Courier New" pitchFamily="34" charset="-120"/>
-              </a:rPr>
-              <a:t>Observation: issue_refund: moved 500 to acct-attacker </a:t>
-            </a:r>
-            <a:r>
-              <a:rPr lang="en-US" sz="1500" dirty="0">
-                <a:solidFill>
-                  <a:srgbClr val="36CDFF"/>
-                </a:solidFill>
-                <a:latin typeface="Courier New" pitchFamily="34" charset="0"/>
-                <a:ea typeface="Courier New" pitchFamily="34" charset="-122"/>
-                <a:cs typeface="Courier New" pitchFamily="34" charset="-120"/>
-              </a:rPr>
-              <a:t>Thought: </a:t>
-            </a:r>
-            <a:r>
-              <a:rPr lang="en-US" sz="1500" dirty="0">
-                <a:solidFill>
-                  <a:srgbClr val="C8C8C8"/>
-                </a:solidFill>
-                <a:latin typeface="Courier New" pitchFamily="34" charset="0"/>
-                <a:ea typeface="Courier New" pitchFamily="34" charset="-122"/>
-                <a:cs typeface="Courier New" pitchFamily="34" charset="-120"/>
-              </a:rPr>
-              <a:t>  done</a:t>
-            </a:r>
-            <a:endParaRPr lang="en-US" sz="1500" dirty="0"/>
-          </a:p>
-          <a:p>
-            <a:pPr marL="0" indent="0" algn="l">
-              <a:lnSpc>
-                <a:spcPct val="146667"/>
-              </a:lnSpc>
-              <a:buNone/>
-            </a:pPr>
-            <a:r>
-              <a:rPr lang="en-US" sz="1500" dirty="0">
-                <a:solidFill>
-                  <a:srgbClr val="C8C8C8"/>
-                </a:solidFill>
-                <a:latin typeface="Courier New" pitchFamily="34" charset="0"/>
-                <a:ea typeface="Courier New" pitchFamily="34" charset="-122"/>
-                <a:cs typeface="Courier New" pitchFamily="34" charset="-120"/>
-              </a:rPr>
               <a:t>Answer:   I've issued your refund.</a:t>
             </a:r>
-            <a:endParaRPr lang="en-US" sz="1500" dirty="0"/>
           </a:p>
         </p:txBody>
       </p:sp>
@@ -20471,7 +19566,7 @@
         </p:nvSpPr>
         <p:spPr>
           <a:xfrm>
-            <a:off x="990600" y="7296820"/>
+            <a:off x="1000125" y="8804226"/>
             <a:ext cx="17811750" cy="443359"/>
           </a:xfrm>
           <a:prstGeom prst="rect">
